--- a/slides/CSC336-Lecture-19-HTTP-Status-Codes-and-Headers.pptx
+++ b/slides/CSC336-Lecture-19-HTTP-Status-Codes-and-Headers.pptx
@@ -2925,79 +2925,44 @@
       </p:sp>
       <p:sp>
         <p:nvSpPr>
-          <p:cNvPr id="6" name="Text 4"/>
+          <p:cNvPr id="8" name="cuinotes-footer-mark"/>
           <p:cNvSpPr txBox="1"/>
           <p:nvPr/>
         </p:nvSpPr>
         <p:spPr>
           <a:xfrm>
-            <a:off x="640080" y="6446520"/>
-            <a:ext cx="8686800" cy="292608"/>
+            <a:off x="9951720" y="6455664"/>
+            <a:ext cx="2011680" cy="292608"/>
           </a:xfrm>
           <a:prstGeom prst="rect">
             <a:avLst/>
           </a:prstGeom>
           <a:noFill/>
-          <a:ln/>
-        </p:spPr>
-        <p:txBody>
-          <a:bodyPr wrap="square" lIns="0" tIns="0" rIns="0" bIns="0" rtlCol="0" anchor="ctr"/>
-          <a:lstStyle/>
-          <a:p>
-            <a:pPr algn="l" indent="0" marL="0">
-              <a:buNone/>
-            </a:pPr>
-            <a:r>
-              <a:rPr lang="en-US" sz="900" dirty="0">
-                <a:solidFill>
-                  <a:srgbClr val="9AA3D8"/>
-                </a:solidFill>
-                <a:latin typeface="Calibri" pitchFamily="34" charset="0"/>
-                <a:ea typeface="Calibri" pitchFamily="34" charset="-122"/>
-                <a:cs typeface="Calibri" pitchFamily="34" charset="-120"/>
-              </a:rPr>
-              <a:t>Usman Akram  •  COMSATS University Islamabad</a:t>
-            </a:r>
-            <a:endParaRPr lang="en-US" sz="900" dirty="0"/>
-          </a:p>
-        </p:txBody>
-      </p:sp>
-      <p:sp>
-        <p:nvSpPr>
-          <p:cNvPr id="7" name="Text 5"/>
-          <p:cNvSpPr txBox="1"/>
-          <p:nvPr/>
-        </p:nvSpPr>
-        <p:spPr>
-          <a:xfrm>
-            <a:off x="11155680" y="6446520"/>
-            <a:ext cx="457200" cy="292608"/>
-          </a:xfrm>
-          <a:prstGeom prst="rect">
-            <a:avLst/>
-          </a:prstGeom>
-          <a:noFill/>
-          <a:ln/>
-        </p:spPr>
-        <p:txBody>
-          <a:bodyPr wrap="square" lIns="0" tIns="0" rIns="0" bIns="0" rtlCol="0" anchor="ctr"/>
-          <a:lstStyle/>
-          <a:p>
-            <a:pPr algn="r" indent="0" marL="0">
-              <a:buNone/>
-            </a:pPr>
-            <a:r>
-              <a:rPr lang="en-US" sz="900" dirty="0">
-                <a:solidFill>
-                  <a:srgbClr val="9AA3D8"/>
-                </a:solidFill>
-                <a:latin typeface="Calibri" pitchFamily="34" charset="0"/>
-                <a:ea typeface="Calibri" pitchFamily="34" charset="-122"/>
-                <a:cs typeface="Calibri" pitchFamily="34" charset="-120"/>
-              </a:rPr>
-              <a:t>1</a:t>
-            </a:r>
-            <a:endParaRPr lang="en-US" sz="900" dirty="0"/>
+        </p:spPr>
+        <p:txBody>
+          <a:bodyPr wrap="none" lIns="0" rIns="0" tIns="0" bIns="0">
+            <a:spAutoFit/>
+          </a:bodyPr>
+          <a:lstStyle/>
+          <a:p>
+            <a:pPr algn="r"/>
+            <a:r>
+              <a:rPr sz="1000">
+                <a:solidFill>
+                  <a:srgbClr val="8A939B"/>
+                </a:solidFill>
+                <a:hlinkClick r:id="rId3"/>
+              </a:rPr>
+              <a:t>cuinotes.com</a:t>
+            </a:r>
+            <a:r>
+              <a:rPr sz="1000">
+                <a:solidFill>
+                  <a:srgbClr val="8A939B"/>
+                </a:solidFill>
+              </a:rPr>
+              <a:t>  ·  1</a:t>
+            </a:r>
           </a:p>
         </p:txBody>
       </p:sp>
@@ -3137,6 +3102,10 @@
             <a:prstDash val="solid"/>
           </a:ln>
         </p:spPr>
+        <p:txBody>
+          <a:bodyPr/>
+          <a:p/>
+        </p:txBody>
       </p:sp>
       <p:sp>
         <p:nvSpPr>
@@ -3218,79 +3187,44 @@
       </p:sp>
       <p:sp>
         <p:nvSpPr>
-          <p:cNvPr id="7" name="Text 5"/>
+          <p:cNvPr id="9" name="cuinotes-footer-mark"/>
           <p:cNvSpPr txBox="1"/>
           <p:nvPr/>
         </p:nvSpPr>
         <p:spPr>
           <a:xfrm>
-            <a:off x="640080" y="6446520"/>
-            <a:ext cx="8686800" cy="292608"/>
+            <a:off x="9951720" y="6455664"/>
+            <a:ext cx="2011680" cy="292608"/>
           </a:xfrm>
           <a:prstGeom prst="rect">
             <a:avLst/>
           </a:prstGeom>
           <a:noFill/>
-          <a:ln/>
-        </p:spPr>
-        <p:txBody>
-          <a:bodyPr wrap="square" lIns="0" tIns="0" rIns="0" bIns="0" rtlCol="0" anchor="ctr"/>
-          <a:lstStyle/>
-          <a:p>
-            <a:pPr algn="l" indent="0" marL="0">
-              <a:buNone/>
-            </a:pPr>
-            <a:r>
-              <a:rPr lang="en-US" sz="900" dirty="0">
-                <a:solidFill>
-                  <a:srgbClr val="5D5D72"/>
-                </a:solidFill>
-                <a:latin typeface="Calibri" pitchFamily="34" charset="0"/>
-                <a:ea typeface="Calibri" pitchFamily="34" charset="-122"/>
-                <a:cs typeface="Calibri" pitchFamily="34" charset="-120"/>
-              </a:rPr>
-              <a:t>Usman Akram  •  COMSATS University Islamabad</a:t>
-            </a:r>
-            <a:endParaRPr lang="en-US" sz="900" dirty="0"/>
-          </a:p>
-        </p:txBody>
-      </p:sp>
-      <p:sp>
-        <p:nvSpPr>
-          <p:cNvPr id="8" name="Text 6"/>
-          <p:cNvSpPr txBox="1"/>
-          <p:nvPr/>
-        </p:nvSpPr>
-        <p:spPr>
-          <a:xfrm>
-            <a:off x="11155680" y="6446520"/>
-            <a:ext cx="457200" cy="292608"/>
-          </a:xfrm>
-          <a:prstGeom prst="rect">
-            <a:avLst/>
-          </a:prstGeom>
-          <a:noFill/>
-          <a:ln/>
-        </p:spPr>
-        <p:txBody>
-          <a:bodyPr wrap="square" lIns="0" tIns="0" rIns="0" bIns="0" rtlCol="0" anchor="ctr"/>
-          <a:lstStyle/>
-          <a:p>
-            <a:pPr algn="r" indent="0" marL="0">
-              <a:buNone/>
-            </a:pPr>
-            <a:r>
-              <a:rPr lang="en-US" sz="900" dirty="0">
-                <a:solidFill>
-                  <a:srgbClr val="5D5D72"/>
-                </a:solidFill>
-                <a:latin typeface="Calibri" pitchFamily="34" charset="0"/>
-                <a:ea typeface="Calibri" pitchFamily="34" charset="-122"/>
-                <a:cs typeface="Calibri" pitchFamily="34" charset="-120"/>
-              </a:rPr>
-              <a:t>10</a:t>
-            </a:r>
-            <a:endParaRPr lang="en-US" sz="900" dirty="0"/>
+        </p:spPr>
+        <p:txBody>
+          <a:bodyPr wrap="none" lIns="0" rIns="0" tIns="0" bIns="0">
+            <a:spAutoFit/>
+          </a:bodyPr>
+          <a:lstStyle/>
+          <a:p>
+            <a:pPr algn="r"/>
+            <a:r>
+              <a:rPr sz="1000">
+                <a:solidFill>
+                  <a:srgbClr val="8A939B"/>
+                </a:solidFill>
+                <a:hlinkClick r:id="rId3"/>
+              </a:rPr>
+              <a:t>cuinotes.com</a:t>
+            </a:r>
+            <a:r>
+              <a:rPr sz="1000">
+                <a:solidFill>
+                  <a:srgbClr val="8A939B"/>
+                </a:solidFill>
+              </a:rPr>
+              <a:t>  ·  10</a:t>
+            </a:r>
           </a:p>
         </p:txBody>
       </p:sp>
@@ -3430,6 +3364,10 @@
             <a:prstDash val="solid"/>
           </a:ln>
         </p:spPr>
+        <p:txBody>
+          <a:bodyPr/>
+          <a:p/>
+        </p:txBody>
       </p:sp>
       <p:sp>
         <p:nvSpPr>
@@ -3511,79 +3449,44 @@
       </p:sp>
       <p:sp>
         <p:nvSpPr>
-          <p:cNvPr id="7" name="Text 5"/>
+          <p:cNvPr id="9" name="cuinotes-footer-mark"/>
           <p:cNvSpPr txBox="1"/>
           <p:nvPr/>
         </p:nvSpPr>
         <p:spPr>
           <a:xfrm>
-            <a:off x="640080" y="6446520"/>
-            <a:ext cx="8686800" cy="292608"/>
+            <a:off x="9951720" y="6455664"/>
+            <a:ext cx="2011680" cy="292608"/>
           </a:xfrm>
           <a:prstGeom prst="rect">
             <a:avLst/>
           </a:prstGeom>
           <a:noFill/>
-          <a:ln/>
-        </p:spPr>
-        <p:txBody>
-          <a:bodyPr wrap="square" lIns="0" tIns="0" rIns="0" bIns="0" rtlCol="0" anchor="ctr"/>
-          <a:lstStyle/>
-          <a:p>
-            <a:pPr algn="l" indent="0" marL="0">
-              <a:buNone/>
-            </a:pPr>
-            <a:r>
-              <a:rPr lang="en-US" sz="900" dirty="0">
-                <a:solidFill>
-                  <a:srgbClr val="5D5D72"/>
-                </a:solidFill>
-                <a:latin typeface="Calibri" pitchFamily="34" charset="0"/>
-                <a:ea typeface="Calibri" pitchFamily="34" charset="-122"/>
-                <a:cs typeface="Calibri" pitchFamily="34" charset="-120"/>
-              </a:rPr>
-              <a:t>Usman Akram  •  COMSATS University Islamabad</a:t>
-            </a:r>
-            <a:endParaRPr lang="en-US" sz="900" dirty="0"/>
-          </a:p>
-        </p:txBody>
-      </p:sp>
-      <p:sp>
-        <p:nvSpPr>
-          <p:cNvPr id="8" name="Text 6"/>
-          <p:cNvSpPr txBox="1"/>
-          <p:nvPr/>
-        </p:nvSpPr>
-        <p:spPr>
-          <a:xfrm>
-            <a:off x="11155680" y="6446520"/>
-            <a:ext cx="457200" cy="292608"/>
-          </a:xfrm>
-          <a:prstGeom prst="rect">
-            <a:avLst/>
-          </a:prstGeom>
-          <a:noFill/>
-          <a:ln/>
-        </p:spPr>
-        <p:txBody>
-          <a:bodyPr wrap="square" lIns="0" tIns="0" rIns="0" bIns="0" rtlCol="0" anchor="ctr"/>
-          <a:lstStyle/>
-          <a:p>
-            <a:pPr algn="r" indent="0" marL="0">
-              <a:buNone/>
-            </a:pPr>
-            <a:r>
-              <a:rPr lang="en-US" sz="900" dirty="0">
-                <a:solidFill>
-                  <a:srgbClr val="5D5D72"/>
-                </a:solidFill>
-                <a:latin typeface="Calibri" pitchFamily="34" charset="0"/>
-                <a:ea typeface="Calibri" pitchFamily="34" charset="-122"/>
-                <a:cs typeface="Calibri" pitchFamily="34" charset="-120"/>
-              </a:rPr>
-              <a:t>11</a:t>
-            </a:r>
-            <a:endParaRPr lang="en-US" sz="900" dirty="0"/>
+        </p:spPr>
+        <p:txBody>
+          <a:bodyPr wrap="none" lIns="0" rIns="0" tIns="0" bIns="0">
+            <a:spAutoFit/>
+          </a:bodyPr>
+          <a:lstStyle/>
+          <a:p>
+            <a:pPr algn="r"/>
+            <a:r>
+              <a:rPr sz="1000">
+                <a:solidFill>
+                  <a:srgbClr val="8A939B"/>
+                </a:solidFill>
+                <a:hlinkClick r:id="rId3"/>
+              </a:rPr>
+              <a:t>cuinotes.com</a:t>
+            </a:r>
+            <a:r>
+              <a:rPr sz="1000">
+                <a:solidFill>
+                  <a:srgbClr val="8A939B"/>
+                </a:solidFill>
+              </a:rPr>
+              <a:t>  ·  11</a:t>
+            </a:r>
           </a:p>
         </p:txBody>
       </p:sp>
@@ -3718,6 +3621,10 @@
           </a:solidFill>
           <a:ln/>
         </p:spPr>
+        <p:txBody>
+          <a:bodyPr/>
+          <a:p/>
+        </p:txBody>
       </p:sp>
       <p:sp>
         <p:nvSpPr>
@@ -4049,79 +3956,44 @@
       </p:sp>
       <p:sp>
         <p:nvSpPr>
-          <p:cNvPr id="7" name="Text 5"/>
+          <p:cNvPr id="9" name="cuinotes-footer-mark"/>
           <p:cNvSpPr txBox="1"/>
           <p:nvPr/>
         </p:nvSpPr>
         <p:spPr>
           <a:xfrm>
-            <a:off x="640080" y="6446520"/>
-            <a:ext cx="8686800" cy="292608"/>
+            <a:off x="9951720" y="6455664"/>
+            <a:ext cx="2011680" cy="292608"/>
           </a:xfrm>
           <a:prstGeom prst="rect">
             <a:avLst/>
           </a:prstGeom>
           <a:noFill/>
-          <a:ln/>
-        </p:spPr>
-        <p:txBody>
-          <a:bodyPr wrap="square" lIns="0" tIns="0" rIns="0" bIns="0" rtlCol="0" anchor="ctr"/>
-          <a:lstStyle/>
-          <a:p>
-            <a:pPr algn="l" indent="0" marL="0">
-              <a:buNone/>
-            </a:pPr>
-            <a:r>
-              <a:rPr lang="en-US" sz="900" dirty="0">
-                <a:solidFill>
-                  <a:srgbClr val="5D5D72"/>
-                </a:solidFill>
-                <a:latin typeface="Calibri" pitchFamily="34" charset="0"/>
-                <a:ea typeface="Calibri" pitchFamily="34" charset="-122"/>
-                <a:cs typeface="Calibri" pitchFamily="34" charset="-120"/>
-              </a:rPr>
-              <a:t>Usman Akram  •  COMSATS University Islamabad</a:t>
-            </a:r>
-            <a:endParaRPr lang="en-US" sz="900" dirty="0"/>
-          </a:p>
-        </p:txBody>
-      </p:sp>
-      <p:sp>
-        <p:nvSpPr>
-          <p:cNvPr id="8" name="Text 6"/>
-          <p:cNvSpPr txBox="1"/>
-          <p:nvPr/>
-        </p:nvSpPr>
-        <p:spPr>
-          <a:xfrm>
-            <a:off x="11155680" y="6446520"/>
-            <a:ext cx="457200" cy="292608"/>
-          </a:xfrm>
-          <a:prstGeom prst="rect">
-            <a:avLst/>
-          </a:prstGeom>
-          <a:noFill/>
-          <a:ln/>
-        </p:spPr>
-        <p:txBody>
-          <a:bodyPr wrap="square" lIns="0" tIns="0" rIns="0" bIns="0" rtlCol="0" anchor="ctr"/>
-          <a:lstStyle/>
-          <a:p>
-            <a:pPr algn="r" indent="0" marL="0">
-              <a:buNone/>
-            </a:pPr>
-            <a:r>
-              <a:rPr lang="en-US" sz="900" dirty="0">
-                <a:solidFill>
-                  <a:srgbClr val="5D5D72"/>
-                </a:solidFill>
-                <a:latin typeface="Calibri" pitchFamily="34" charset="0"/>
-                <a:ea typeface="Calibri" pitchFamily="34" charset="-122"/>
-                <a:cs typeface="Calibri" pitchFamily="34" charset="-120"/>
-              </a:rPr>
-              <a:t>12</a:t>
-            </a:r>
-            <a:endParaRPr lang="en-US" sz="900" dirty="0"/>
+        </p:spPr>
+        <p:txBody>
+          <a:bodyPr wrap="none" lIns="0" rIns="0" tIns="0" bIns="0">
+            <a:spAutoFit/>
+          </a:bodyPr>
+          <a:lstStyle/>
+          <a:p>
+            <a:pPr algn="r"/>
+            <a:r>
+              <a:rPr sz="1000">
+                <a:solidFill>
+                  <a:srgbClr val="8A939B"/>
+                </a:solidFill>
+                <a:hlinkClick r:id="rId3"/>
+              </a:rPr>
+              <a:t>cuinotes.com</a:t>
+            </a:r>
+            <a:r>
+              <a:rPr sz="1000">
+                <a:solidFill>
+                  <a:srgbClr val="8A939B"/>
+                </a:solidFill>
+              </a:rPr>
+              <a:t>  ·  12</a:t>
+            </a:r>
           </a:p>
         </p:txBody>
       </p:sp>
@@ -4256,6 +4128,10 @@
           </a:solidFill>
           <a:ln/>
         </p:spPr>
+        <p:txBody>
+          <a:bodyPr/>
+          <a:p/>
+        </p:txBody>
       </p:sp>
       <p:sp>
         <p:nvSpPr>
@@ -4589,79 +4465,44 @@
       </p:sp>
       <p:sp>
         <p:nvSpPr>
-          <p:cNvPr id="7" name="Text 5"/>
+          <p:cNvPr id="9" name="cuinotes-footer-mark"/>
           <p:cNvSpPr txBox="1"/>
           <p:nvPr/>
         </p:nvSpPr>
         <p:spPr>
           <a:xfrm>
-            <a:off x="640080" y="6446520"/>
-            <a:ext cx="8686800" cy="292608"/>
+            <a:off x="9951720" y="6455664"/>
+            <a:ext cx="2011680" cy="292608"/>
           </a:xfrm>
           <a:prstGeom prst="rect">
             <a:avLst/>
           </a:prstGeom>
           <a:noFill/>
-          <a:ln/>
-        </p:spPr>
-        <p:txBody>
-          <a:bodyPr wrap="square" lIns="0" tIns="0" rIns="0" bIns="0" rtlCol="0" anchor="ctr"/>
-          <a:lstStyle/>
-          <a:p>
-            <a:pPr algn="l" indent="0" marL="0">
-              <a:buNone/>
-            </a:pPr>
-            <a:r>
-              <a:rPr lang="en-US" sz="900" dirty="0">
-                <a:solidFill>
-                  <a:srgbClr val="5D5D72"/>
-                </a:solidFill>
-                <a:latin typeface="Calibri" pitchFamily="34" charset="0"/>
-                <a:ea typeface="Calibri" pitchFamily="34" charset="-122"/>
-                <a:cs typeface="Calibri" pitchFamily="34" charset="-120"/>
-              </a:rPr>
-              <a:t>Usman Akram  •  COMSATS University Islamabad</a:t>
-            </a:r>
-            <a:endParaRPr lang="en-US" sz="900" dirty="0"/>
-          </a:p>
-        </p:txBody>
-      </p:sp>
-      <p:sp>
-        <p:nvSpPr>
-          <p:cNvPr id="8" name="Text 6"/>
-          <p:cNvSpPr txBox="1"/>
-          <p:nvPr/>
-        </p:nvSpPr>
-        <p:spPr>
-          <a:xfrm>
-            <a:off x="11155680" y="6446520"/>
-            <a:ext cx="457200" cy="292608"/>
-          </a:xfrm>
-          <a:prstGeom prst="rect">
-            <a:avLst/>
-          </a:prstGeom>
-          <a:noFill/>
-          <a:ln/>
-        </p:spPr>
-        <p:txBody>
-          <a:bodyPr wrap="square" lIns="0" tIns="0" rIns="0" bIns="0" rtlCol="0" anchor="ctr"/>
-          <a:lstStyle/>
-          <a:p>
-            <a:pPr algn="r" indent="0" marL="0">
-              <a:buNone/>
-            </a:pPr>
-            <a:r>
-              <a:rPr lang="en-US" sz="900" dirty="0">
-                <a:solidFill>
-                  <a:srgbClr val="5D5D72"/>
-                </a:solidFill>
-                <a:latin typeface="Calibri" pitchFamily="34" charset="0"/>
-                <a:ea typeface="Calibri" pitchFamily="34" charset="-122"/>
-                <a:cs typeface="Calibri" pitchFamily="34" charset="-120"/>
-              </a:rPr>
-              <a:t>13</a:t>
-            </a:r>
-            <a:endParaRPr lang="en-US" sz="900" dirty="0"/>
+        </p:spPr>
+        <p:txBody>
+          <a:bodyPr wrap="none" lIns="0" rIns="0" tIns="0" bIns="0">
+            <a:spAutoFit/>
+          </a:bodyPr>
+          <a:lstStyle/>
+          <a:p>
+            <a:pPr algn="r"/>
+            <a:r>
+              <a:rPr sz="1000">
+                <a:solidFill>
+                  <a:srgbClr val="8A939B"/>
+                </a:solidFill>
+                <a:hlinkClick r:id="rId3"/>
+              </a:rPr>
+              <a:t>cuinotes.com</a:t>
+            </a:r>
+            <a:r>
+              <a:rPr sz="1000">
+                <a:solidFill>
+                  <a:srgbClr val="8A939B"/>
+                </a:solidFill>
+              </a:rPr>
+              <a:t>  ·  13</a:t>
+            </a:r>
           </a:p>
         </p:txBody>
       </p:sp>
@@ -5497,79 +5338,44 @@
       </p:graphicFrame>
       <p:sp>
         <p:nvSpPr>
-          <p:cNvPr id="5" name="Text 2"/>
+          <p:cNvPr id="16" name="cuinotes-footer-mark"/>
           <p:cNvSpPr txBox="1"/>
           <p:nvPr/>
         </p:nvSpPr>
         <p:spPr>
           <a:xfrm>
-            <a:off x="640080" y="6446520"/>
-            <a:ext cx="8686800" cy="292608"/>
+            <a:off x="9951720" y="6455664"/>
+            <a:ext cx="2011680" cy="292608"/>
           </a:xfrm>
           <a:prstGeom prst="rect">
             <a:avLst/>
           </a:prstGeom>
           <a:noFill/>
-          <a:ln/>
-        </p:spPr>
-        <p:txBody>
-          <a:bodyPr wrap="square" lIns="0" tIns="0" rIns="0" bIns="0" rtlCol="0" anchor="ctr"/>
-          <a:lstStyle/>
-          <a:p>
-            <a:pPr algn="l" indent="0" marL="0">
-              <a:buNone/>
-            </a:pPr>
-            <a:r>
-              <a:rPr lang="en-US" sz="900" dirty="0">
-                <a:solidFill>
-                  <a:srgbClr val="5D5D72"/>
-                </a:solidFill>
-                <a:latin typeface="Calibri" pitchFamily="34" charset="0"/>
-                <a:ea typeface="Calibri" pitchFamily="34" charset="-122"/>
-                <a:cs typeface="Calibri" pitchFamily="34" charset="-120"/>
-              </a:rPr>
-              <a:t>Usman Akram  •  COMSATS University Islamabad</a:t>
-            </a:r>
-            <a:endParaRPr lang="en-US" sz="900" dirty="0"/>
-          </a:p>
-        </p:txBody>
-      </p:sp>
-      <p:sp>
-        <p:nvSpPr>
-          <p:cNvPr id="6" name="Text 3"/>
-          <p:cNvSpPr txBox="1"/>
-          <p:nvPr/>
-        </p:nvSpPr>
-        <p:spPr>
-          <a:xfrm>
-            <a:off x="11155680" y="6446520"/>
-            <a:ext cx="457200" cy="292608"/>
-          </a:xfrm>
-          <a:prstGeom prst="rect">
-            <a:avLst/>
-          </a:prstGeom>
-          <a:noFill/>
-          <a:ln/>
-        </p:spPr>
-        <p:txBody>
-          <a:bodyPr wrap="square" lIns="0" tIns="0" rIns="0" bIns="0" rtlCol="0" anchor="ctr"/>
-          <a:lstStyle/>
-          <a:p>
-            <a:pPr algn="r" indent="0" marL="0">
-              <a:buNone/>
-            </a:pPr>
-            <a:r>
-              <a:rPr lang="en-US" sz="900" dirty="0">
-                <a:solidFill>
-                  <a:srgbClr val="5D5D72"/>
-                </a:solidFill>
-                <a:latin typeface="Calibri" pitchFamily="34" charset="0"/>
-                <a:ea typeface="Calibri" pitchFamily="34" charset="-122"/>
-                <a:cs typeface="Calibri" pitchFamily="34" charset="-120"/>
-              </a:rPr>
-              <a:t>14</a:t>
-            </a:r>
-            <a:endParaRPr lang="en-US" sz="900" dirty="0"/>
+        </p:spPr>
+        <p:txBody>
+          <a:bodyPr wrap="none" lIns="0" rIns="0" tIns="0" bIns="0">
+            <a:spAutoFit/>
+          </a:bodyPr>
+          <a:lstStyle/>
+          <a:p>
+            <a:pPr algn="r"/>
+            <a:r>
+              <a:rPr sz="1000">
+                <a:solidFill>
+                  <a:srgbClr val="8A939B"/>
+                </a:solidFill>
+                <a:hlinkClick r:id="rId3"/>
+              </a:rPr>
+              <a:t>cuinotes.com</a:t>
+            </a:r>
+            <a:r>
+              <a:rPr sz="1000">
+                <a:solidFill>
+                  <a:srgbClr val="8A939B"/>
+                </a:solidFill>
+              </a:rPr>
+              <a:t>  ·  14</a:t>
+            </a:r>
           </a:p>
         </p:txBody>
       </p:sp>
@@ -5704,6 +5510,10 @@
           </a:solidFill>
           <a:ln/>
         </p:spPr>
+        <p:txBody>
+          <a:bodyPr/>
+          <a:p/>
+        </p:txBody>
       </p:sp>
       <p:sp>
         <p:nvSpPr>
@@ -5868,79 +5678,44 @@
       </p:sp>
       <p:sp>
         <p:nvSpPr>
-          <p:cNvPr id="7" name="Text 5"/>
+          <p:cNvPr id="9" name="cuinotes-footer-mark"/>
           <p:cNvSpPr txBox="1"/>
           <p:nvPr/>
         </p:nvSpPr>
         <p:spPr>
           <a:xfrm>
-            <a:off x="640080" y="6446520"/>
-            <a:ext cx="8686800" cy="292608"/>
+            <a:off x="9951720" y="6455664"/>
+            <a:ext cx="2011680" cy="292608"/>
           </a:xfrm>
           <a:prstGeom prst="rect">
             <a:avLst/>
           </a:prstGeom>
           <a:noFill/>
-          <a:ln/>
-        </p:spPr>
-        <p:txBody>
-          <a:bodyPr wrap="square" lIns="0" tIns="0" rIns="0" bIns="0" rtlCol="0" anchor="ctr"/>
-          <a:lstStyle/>
-          <a:p>
-            <a:pPr algn="l" indent="0" marL="0">
-              <a:buNone/>
-            </a:pPr>
-            <a:r>
-              <a:rPr lang="en-US" sz="900" dirty="0">
-                <a:solidFill>
-                  <a:srgbClr val="5D5D72"/>
-                </a:solidFill>
-                <a:latin typeface="Calibri" pitchFamily="34" charset="0"/>
-                <a:ea typeface="Calibri" pitchFamily="34" charset="-122"/>
-                <a:cs typeface="Calibri" pitchFamily="34" charset="-120"/>
-              </a:rPr>
-              <a:t>Usman Akram  •  COMSATS University Islamabad</a:t>
-            </a:r>
-            <a:endParaRPr lang="en-US" sz="900" dirty="0"/>
-          </a:p>
-        </p:txBody>
-      </p:sp>
-      <p:sp>
-        <p:nvSpPr>
-          <p:cNvPr id="8" name="Text 6"/>
-          <p:cNvSpPr txBox="1"/>
-          <p:nvPr/>
-        </p:nvSpPr>
-        <p:spPr>
-          <a:xfrm>
-            <a:off x="11155680" y="6446520"/>
-            <a:ext cx="457200" cy="292608"/>
-          </a:xfrm>
-          <a:prstGeom prst="rect">
-            <a:avLst/>
-          </a:prstGeom>
-          <a:noFill/>
-          <a:ln/>
-        </p:spPr>
-        <p:txBody>
-          <a:bodyPr wrap="square" lIns="0" tIns="0" rIns="0" bIns="0" rtlCol="0" anchor="ctr"/>
-          <a:lstStyle/>
-          <a:p>
-            <a:pPr algn="r" indent="0" marL="0">
-              <a:buNone/>
-            </a:pPr>
-            <a:r>
-              <a:rPr lang="en-US" sz="900" dirty="0">
-                <a:solidFill>
-                  <a:srgbClr val="5D5D72"/>
-                </a:solidFill>
-                <a:latin typeface="Calibri" pitchFamily="34" charset="0"/>
-                <a:ea typeface="Calibri" pitchFamily="34" charset="-122"/>
-                <a:cs typeface="Calibri" pitchFamily="34" charset="-120"/>
-              </a:rPr>
-              <a:t>15</a:t>
-            </a:r>
-            <a:endParaRPr lang="en-US" sz="900" dirty="0"/>
+        </p:spPr>
+        <p:txBody>
+          <a:bodyPr wrap="none" lIns="0" rIns="0" tIns="0" bIns="0">
+            <a:spAutoFit/>
+          </a:bodyPr>
+          <a:lstStyle/>
+          <a:p>
+            <a:pPr algn="r"/>
+            <a:r>
+              <a:rPr sz="1000">
+                <a:solidFill>
+                  <a:srgbClr val="8A939B"/>
+                </a:solidFill>
+                <a:hlinkClick r:id="rId3"/>
+              </a:rPr>
+              <a:t>cuinotes.com</a:t>
+            </a:r>
+            <a:r>
+              <a:rPr sz="1000">
+                <a:solidFill>
+                  <a:srgbClr val="8A939B"/>
+                </a:solidFill>
+              </a:rPr>
+              <a:t>  ·  15</a:t>
+            </a:r>
           </a:p>
         </p:txBody>
       </p:sp>
@@ -6776,79 +6551,44 @@
       </p:graphicFrame>
       <p:sp>
         <p:nvSpPr>
-          <p:cNvPr id="5" name="Text 2"/>
+          <p:cNvPr id="18" name="cuinotes-footer-mark"/>
           <p:cNvSpPr txBox="1"/>
           <p:nvPr/>
         </p:nvSpPr>
         <p:spPr>
           <a:xfrm>
-            <a:off x="640080" y="6446520"/>
-            <a:ext cx="8686800" cy="292608"/>
+            <a:off x="9951720" y="6455664"/>
+            <a:ext cx="2011680" cy="292608"/>
           </a:xfrm>
           <a:prstGeom prst="rect">
             <a:avLst/>
           </a:prstGeom>
           <a:noFill/>
-          <a:ln/>
-        </p:spPr>
-        <p:txBody>
-          <a:bodyPr wrap="square" lIns="0" tIns="0" rIns="0" bIns="0" rtlCol="0" anchor="ctr"/>
-          <a:lstStyle/>
-          <a:p>
-            <a:pPr algn="l" indent="0" marL="0">
-              <a:buNone/>
-            </a:pPr>
-            <a:r>
-              <a:rPr lang="en-US" sz="900" dirty="0">
-                <a:solidFill>
-                  <a:srgbClr val="5D5D72"/>
-                </a:solidFill>
-                <a:latin typeface="Calibri" pitchFamily="34" charset="0"/>
-                <a:ea typeface="Calibri" pitchFamily="34" charset="-122"/>
-                <a:cs typeface="Calibri" pitchFamily="34" charset="-120"/>
-              </a:rPr>
-              <a:t>Usman Akram  •  COMSATS University Islamabad</a:t>
-            </a:r>
-            <a:endParaRPr lang="en-US" sz="900" dirty="0"/>
-          </a:p>
-        </p:txBody>
-      </p:sp>
-      <p:sp>
-        <p:nvSpPr>
-          <p:cNvPr id="6" name="Text 3"/>
-          <p:cNvSpPr txBox="1"/>
-          <p:nvPr/>
-        </p:nvSpPr>
-        <p:spPr>
-          <a:xfrm>
-            <a:off x="11155680" y="6446520"/>
-            <a:ext cx="457200" cy="292608"/>
-          </a:xfrm>
-          <a:prstGeom prst="rect">
-            <a:avLst/>
-          </a:prstGeom>
-          <a:noFill/>
-          <a:ln/>
-        </p:spPr>
-        <p:txBody>
-          <a:bodyPr wrap="square" lIns="0" tIns="0" rIns="0" bIns="0" rtlCol="0" anchor="ctr"/>
-          <a:lstStyle/>
-          <a:p>
-            <a:pPr algn="r" indent="0" marL="0">
-              <a:buNone/>
-            </a:pPr>
-            <a:r>
-              <a:rPr lang="en-US" sz="900" dirty="0">
-                <a:solidFill>
-                  <a:srgbClr val="5D5D72"/>
-                </a:solidFill>
-                <a:latin typeface="Calibri" pitchFamily="34" charset="0"/>
-                <a:ea typeface="Calibri" pitchFamily="34" charset="-122"/>
-                <a:cs typeface="Calibri" pitchFamily="34" charset="-120"/>
-              </a:rPr>
-              <a:t>16</a:t>
-            </a:r>
-            <a:endParaRPr lang="en-US" sz="900" dirty="0"/>
+        </p:spPr>
+        <p:txBody>
+          <a:bodyPr wrap="none" lIns="0" rIns="0" tIns="0" bIns="0">
+            <a:spAutoFit/>
+          </a:bodyPr>
+          <a:lstStyle/>
+          <a:p>
+            <a:pPr algn="r"/>
+            <a:r>
+              <a:rPr sz="1000">
+                <a:solidFill>
+                  <a:srgbClr val="8A939B"/>
+                </a:solidFill>
+                <a:hlinkClick r:id="rId3"/>
+              </a:rPr>
+              <a:t>cuinotes.com</a:t>
+            </a:r>
+            <a:r>
+              <a:rPr sz="1000">
+                <a:solidFill>
+                  <a:srgbClr val="8A939B"/>
+                </a:solidFill>
+              </a:rPr>
+              <a:t>  ·  16</a:t>
+            </a:r>
           </a:p>
         </p:txBody>
       </p:sp>
@@ -6983,6 +6723,10 @@
           </a:solidFill>
           <a:ln/>
         </p:spPr>
+        <p:txBody>
+          <a:bodyPr/>
+          <a:p/>
+        </p:txBody>
       </p:sp>
       <p:sp>
         <p:nvSpPr>
@@ -7196,79 +6940,44 @@
       </p:sp>
       <p:sp>
         <p:nvSpPr>
-          <p:cNvPr id="7" name="Text 5"/>
+          <p:cNvPr id="9" name="cuinotes-footer-mark"/>
           <p:cNvSpPr txBox="1"/>
           <p:nvPr/>
         </p:nvSpPr>
         <p:spPr>
           <a:xfrm>
-            <a:off x="640080" y="6446520"/>
-            <a:ext cx="8686800" cy="292608"/>
+            <a:off x="9951720" y="6455664"/>
+            <a:ext cx="2011680" cy="292608"/>
           </a:xfrm>
           <a:prstGeom prst="rect">
             <a:avLst/>
           </a:prstGeom>
           <a:noFill/>
-          <a:ln/>
-        </p:spPr>
-        <p:txBody>
-          <a:bodyPr wrap="square" lIns="0" tIns="0" rIns="0" bIns="0" rtlCol="0" anchor="ctr"/>
-          <a:lstStyle/>
-          <a:p>
-            <a:pPr algn="l" indent="0" marL="0">
-              <a:buNone/>
-            </a:pPr>
-            <a:r>
-              <a:rPr lang="en-US" sz="900" dirty="0">
-                <a:solidFill>
-                  <a:srgbClr val="5D5D72"/>
-                </a:solidFill>
-                <a:latin typeface="Calibri" pitchFamily="34" charset="0"/>
-                <a:ea typeface="Calibri" pitchFamily="34" charset="-122"/>
-                <a:cs typeface="Calibri" pitchFamily="34" charset="-120"/>
-              </a:rPr>
-              <a:t>Usman Akram  •  COMSATS University Islamabad</a:t>
-            </a:r>
-            <a:endParaRPr lang="en-US" sz="900" dirty="0"/>
-          </a:p>
-        </p:txBody>
-      </p:sp>
-      <p:sp>
-        <p:nvSpPr>
-          <p:cNvPr id="8" name="Text 6"/>
-          <p:cNvSpPr txBox="1"/>
-          <p:nvPr/>
-        </p:nvSpPr>
-        <p:spPr>
-          <a:xfrm>
-            <a:off x="11155680" y="6446520"/>
-            <a:ext cx="457200" cy="292608"/>
-          </a:xfrm>
-          <a:prstGeom prst="rect">
-            <a:avLst/>
-          </a:prstGeom>
-          <a:noFill/>
-          <a:ln/>
-        </p:spPr>
-        <p:txBody>
-          <a:bodyPr wrap="square" lIns="0" tIns="0" rIns="0" bIns="0" rtlCol="0" anchor="ctr"/>
-          <a:lstStyle/>
-          <a:p>
-            <a:pPr algn="r" indent="0" marL="0">
-              <a:buNone/>
-            </a:pPr>
-            <a:r>
-              <a:rPr lang="en-US" sz="900" dirty="0">
-                <a:solidFill>
-                  <a:srgbClr val="5D5D72"/>
-                </a:solidFill>
-                <a:latin typeface="Calibri" pitchFamily="34" charset="0"/>
-                <a:ea typeface="Calibri" pitchFamily="34" charset="-122"/>
-                <a:cs typeface="Calibri" pitchFamily="34" charset="-120"/>
-              </a:rPr>
-              <a:t>17</a:t>
-            </a:r>
-            <a:endParaRPr lang="en-US" sz="900" dirty="0"/>
+        </p:spPr>
+        <p:txBody>
+          <a:bodyPr wrap="none" lIns="0" rIns="0" tIns="0" bIns="0">
+            <a:spAutoFit/>
+          </a:bodyPr>
+          <a:lstStyle/>
+          <a:p>
+            <a:pPr algn="r"/>
+            <a:r>
+              <a:rPr sz="1000">
+                <a:solidFill>
+                  <a:srgbClr val="8A939B"/>
+                </a:solidFill>
+                <a:hlinkClick r:id="rId3"/>
+              </a:rPr>
+              <a:t>cuinotes.com</a:t>
+            </a:r>
+            <a:r>
+              <a:rPr sz="1000">
+                <a:solidFill>
+                  <a:srgbClr val="8A939B"/>
+                </a:solidFill>
+              </a:rPr>
+              <a:t>  ·  17</a:t>
+            </a:r>
           </a:p>
         </p:txBody>
       </p:sp>
@@ -7401,6 +7110,10 @@
           </a:solidFill>
           <a:ln/>
         </p:spPr>
+        <p:txBody>
+          <a:bodyPr/>
+          <a:p/>
+        </p:txBody>
       </p:sp>
       <p:sp>
         <p:nvSpPr>
@@ -7499,6 +7212,10 @@
           </a:solidFill>
           <a:ln/>
         </p:spPr>
+        <p:txBody>
+          <a:bodyPr/>
+          <a:p/>
+        </p:txBody>
       </p:sp>
       <p:sp>
         <p:nvSpPr>
@@ -7597,6 +7314,10 @@
           </a:solidFill>
           <a:ln/>
         </p:spPr>
+        <p:txBody>
+          <a:bodyPr/>
+          <a:p/>
+        </p:txBody>
       </p:sp>
       <p:sp>
         <p:nvSpPr>
@@ -7678,79 +7399,44 @@
       </p:sp>
       <p:sp>
         <p:nvSpPr>
-          <p:cNvPr id="13" name="Text 11"/>
+          <p:cNvPr id="15" name="cuinotes-footer-mark"/>
           <p:cNvSpPr txBox="1"/>
           <p:nvPr/>
         </p:nvSpPr>
         <p:spPr>
           <a:xfrm>
-            <a:off x="640080" y="6446520"/>
-            <a:ext cx="8686800" cy="292608"/>
+            <a:off x="9951720" y="6455664"/>
+            <a:ext cx="2011680" cy="292608"/>
           </a:xfrm>
           <a:prstGeom prst="rect">
             <a:avLst/>
           </a:prstGeom>
           <a:noFill/>
-          <a:ln/>
-        </p:spPr>
-        <p:txBody>
-          <a:bodyPr wrap="square" lIns="0" tIns="0" rIns="0" bIns="0" rtlCol="0" anchor="ctr"/>
-          <a:lstStyle/>
-          <a:p>
-            <a:pPr algn="l" indent="0" marL="0">
-              <a:buNone/>
-            </a:pPr>
-            <a:r>
-              <a:rPr lang="en-US" sz="900" dirty="0">
-                <a:solidFill>
-                  <a:srgbClr val="5D5D72"/>
-                </a:solidFill>
-                <a:latin typeface="Calibri" pitchFamily="34" charset="0"/>
-                <a:ea typeface="Calibri" pitchFamily="34" charset="-122"/>
-                <a:cs typeface="Calibri" pitchFamily="34" charset="-120"/>
-              </a:rPr>
-              <a:t>Usman Akram  •  COMSATS University Islamabad</a:t>
-            </a:r>
-            <a:endParaRPr lang="en-US" sz="900" dirty="0"/>
-          </a:p>
-        </p:txBody>
-      </p:sp>
-      <p:sp>
-        <p:nvSpPr>
-          <p:cNvPr id="14" name="Text 12"/>
-          <p:cNvSpPr txBox="1"/>
-          <p:nvPr/>
-        </p:nvSpPr>
-        <p:spPr>
-          <a:xfrm>
-            <a:off x="11155680" y="6446520"/>
-            <a:ext cx="457200" cy="292608"/>
-          </a:xfrm>
-          <a:prstGeom prst="rect">
-            <a:avLst/>
-          </a:prstGeom>
-          <a:noFill/>
-          <a:ln/>
-        </p:spPr>
-        <p:txBody>
-          <a:bodyPr wrap="square" lIns="0" tIns="0" rIns="0" bIns="0" rtlCol="0" anchor="ctr"/>
-          <a:lstStyle/>
-          <a:p>
-            <a:pPr algn="r" indent="0" marL="0">
-              <a:buNone/>
-            </a:pPr>
-            <a:r>
-              <a:rPr lang="en-US" sz="900" dirty="0">
-                <a:solidFill>
-                  <a:srgbClr val="5D5D72"/>
-                </a:solidFill>
-                <a:latin typeface="Calibri" pitchFamily="34" charset="0"/>
-                <a:ea typeface="Calibri" pitchFamily="34" charset="-122"/>
-                <a:cs typeface="Calibri" pitchFamily="34" charset="-120"/>
-              </a:rPr>
-              <a:t>18</a:t>
-            </a:r>
-            <a:endParaRPr lang="en-US" sz="900" dirty="0"/>
+        </p:spPr>
+        <p:txBody>
+          <a:bodyPr wrap="none" lIns="0" rIns="0" tIns="0" bIns="0">
+            <a:spAutoFit/>
+          </a:bodyPr>
+          <a:lstStyle/>
+          <a:p>
+            <a:pPr algn="r"/>
+            <a:r>
+              <a:rPr sz="1000">
+                <a:solidFill>
+                  <a:srgbClr val="8A939B"/>
+                </a:solidFill>
+                <a:hlinkClick r:id="rId3"/>
+              </a:rPr>
+              <a:t>cuinotes.com</a:t>
+            </a:r>
+            <a:r>
+              <a:rPr sz="1000">
+                <a:solidFill>
+                  <a:srgbClr val="8A939B"/>
+                </a:solidFill>
+              </a:rPr>
+              <a:t>  ·  18</a:t>
+            </a:r>
           </a:p>
         </p:txBody>
       </p:sp>
@@ -7885,6 +7571,10 @@
           </a:solidFill>
           <a:ln/>
         </p:spPr>
+        <p:txBody>
+          <a:bodyPr/>
+          <a:p/>
+        </p:txBody>
       </p:sp>
       <p:sp>
         <p:nvSpPr>
@@ -7965,6 +7655,10 @@
             <a:tailEnd type="triangle"/>
           </a:ln>
         </p:spPr>
+        <p:txBody>
+          <a:bodyPr/>
+          <a:p/>
+        </p:txBody>
       </p:sp>
       <p:sp>
         <p:nvSpPr>
@@ -7987,6 +7681,10 @@
           </a:solidFill>
           <a:ln/>
         </p:spPr>
+        <p:txBody>
+          <a:bodyPr/>
+          <a:p/>
+        </p:txBody>
       </p:sp>
       <p:sp>
         <p:nvSpPr>
@@ -8067,6 +7765,10 @@
             <a:tailEnd type="triangle"/>
           </a:ln>
         </p:spPr>
+        <p:txBody>
+          <a:bodyPr/>
+          <a:p/>
+        </p:txBody>
       </p:sp>
       <p:sp>
         <p:nvSpPr>
@@ -8089,6 +7791,10 @@
           </a:solidFill>
           <a:ln/>
         </p:spPr>
+        <p:txBody>
+          <a:bodyPr/>
+          <a:p/>
+        </p:txBody>
       </p:sp>
       <p:sp>
         <p:nvSpPr>
@@ -8169,6 +7875,10 @@
             <a:tailEnd type="triangle"/>
           </a:ln>
         </p:spPr>
+        <p:txBody>
+          <a:bodyPr/>
+          <a:p/>
+        </p:txBody>
       </p:sp>
       <p:sp>
         <p:nvSpPr>
@@ -8191,6 +7901,10 @@
           </a:solidFill>
           <a:ln/>
         </p:spPr>
+        <p:txBody>
+          <a:bodyPr/>
+          <a:p/>
+        </p:txBody>
       </p:sp>
       <p:sp>
         <p:nvSpPr>
@@ -8289,79 +8003,44 @@
       </p:sp>
       <p:sp>
         <p:nvSpPr>
-          <p:cNvPr id="16" name="Text 14"/>
+          <p:cNvPr id="18" name="cuinotes-footer-mark"/>
           <p:cNvSpPr txBox="1"/>
           <p:nvPr/>
         </p:nvSpPr>
         <p:spPr>
           <a:xfrm>
-            <a:off x="640080" y="6446520"/>
-            <a:ext cx="8686800" cy="292608"/>
+            <a:off x="9951720" y="6455664"/>
+            <a:ext cx="2011680" cy="292608"/>
           </a:xfrm>
           <a:prstGeom prst="rect">
             <a:avLst/>
           </a:prstGeom>
           <a:noFill/>
-          <a:ln/>
-        </p:spPr>
-        <p:txBody>
-          <a:bodyPr wrap="square" lIns="0" tIns="0" rIns="0" bIns="0" rtlCol="0" anchor="ctr"/>
-          <a:lstStyle/>
-          <a:p>
-            <a:pPr algn="l" indent="0" marL="0">
-              <a:buNone/>
-            </a:pPr>
-            <a:r>
-              <a:rPr lang="en-US" sz="900" dirty="0">
-                <a:solidFill>
-                  <a:srgbClr val="5D5D72"/>
-                </a:solidFill>
-                <a:latin typeface="Calibri" pitchFamily="34" charset="0"/>
-                <a:ea typeface="Calibri" pitchFamily="34" charset="-122"/>
-                <a:cs typeface="Calibri" pitchFamily="34" charset="-120"/>
-              </a:rPr>
-              <a:t>Usman Akram  •  COMSATS University Islamabad</a:t>
-            </a:r>
-            <a:endParaRPr lang="en-US" sz="900" dirty="0"/>
-          </a:p>
-        </p:txBody>
-      </p:sp>
-      <p:sp>
-        <p:nvSpPr>
-          <p:cNvPr id="17" name="Text 15"/>
-          <p:cNvSpPr txBox="1"/>
-          <p:nvPr/>
-        </p:nvSpPr>
-        <p:spPr>
-          <a:xfrm>
-            <a:off x="11155680" y="6446520"/>
-            <a:ext cx="457200" cy="292608"/>
-          </a:xfrm>
-          <a:prstGeom prst="rect">
-            <a:avLst/>
-          </a:prstGeom>
-          <a:noFill/>
-          <a:ln/>
-        </p:spPr>
-        <p:txBody>
-          <a:bodyPr wrap="square" lIns="0" tIns="0" rIns="0" bIns="0" rtlCol="0" anchor="ctr"/>
-          <a:lstStyle/>
-          <a:p>
-            <a:pPr algn="r" indent="0" marL="0">
-              <a:buNone/>
-            </a:pPr>
-            <a:r>
-              <a:rPr lang="en-US" sz="900" dirty="0">
-                <a:solidFill>
-                  <a:srgbClr val="5D5D72"/>
-                </a:solidFill>
-                <a:latin typeface="Calibri" pitchFamily="34" charset="0"/>
-                <a:ea typeface="Calibri" pitchFamily="34" charset="-122"/>
-                <a:cs typeface="Calibri" pitchFamily="34" charset="-120"/>
-              </a:rPr>
-              <a:t>19</a:t>
-            </a:r>
-            <a:endParaRPr lang="en-US" sz="900" dirty="0"/>
+        </p:spPr>
+        <p:txBody>
+          <a:bodyPr wrap="none" lIns="0" rIns="0" tIns="0" bIns="0">
+            <a:spAutoFit/>
+          </a:bodyPr>
+          <a:lstStyle/>
+          <a:p>
+            <a:pPr algn="r"/>
+            <a:r>
+              <a:rPr sz="1000">
+                <a:solidFill>
+                  <a:srgbClr val="8A939B"/>
+                </a:solidFill>
+                <a:hlinkClick r:id="rId3"/>
+              </a:rPr>
+              <a:t>cuinotes.com</a:t>
+            </a:r>
+            <a:r>
+              <a:rPr sz="1000">
+                <a:solidFill>
+                  <a:srgbClr val="8A939B"/>
+                </a:solidFill>
+              </a:rPr>
+              <a:t>  ·  19</a:t>
+            </a:r>
           </a:p>
         </p:txBody>
       </p:sp>
@@ -8494,6 +8173,10 @@
           </a:solidFill>
           <a:ln/>
         </p:spPr>
+        <p:txBody>
+          <a:bodyPr/>
+          <a:p/>
+        </p:txBody>
       </p:sp>
       <p:sp>
         <p:nvSpPr>
@@ -8592,6 +8275,10 @@
           </a:solidFill>
           <a:ln/>
         </p:spPr>
+        <p:txBody>
+          <a:bodyPr/>
+          <a:p/>
+        </p:txBody>
       </p:sp>
       <p:sp>
         <p:nvSpPr>
@@ -8690,6 +8377,10 @@
           </a:solidFill>
           <a:ln/>
         </p:spPr>
+        <p:txBody>
+          <a:bodyPr/>
+          <a:p/>
+        </p:txBody>
       </p:sp>
       <p:sp>
         <p:nvSpPr>
@@ -8788,6 +8479,10 @@
           </a:solidFill>
           <a:ln/>
         </p:spPr>
+        <p:txBody>
+          <a:bodyPr/>
+          <a:p/>
+        </p:txBody>
       </p:sp>
       <p:sp>
         <p:nvSpPr>
@@ -8886,6 +8581,10 @@
           </a:solidFill>
           <a:ln/>
         </p:spPr>
+        <p:txBody>
+          <a:bodyPr/>
+          <a:p/>
+        </p:txBody>
       </p:sp>
       <p:sp>
         <p:nvSpPr>
@@ -8967,79 +8666,44 @@
       </p:sp>
       <p:sp>
         <p:nvSpPr>
-          <p:cNvPr id="19" name="Text 17"/>
+          <p:cNvPr id="21" name="cuinotes-footer-mark"/>
           <p:cNvSpPr txBox="1"/>
           <p:nvPr/>
         </p:nvSpPr>
         <p:spPr>
           <a:xfrm>
-            <a:off x="640080" y="6446520"/>
-            <a:ext cx="8686800" cy="292608"/>
+            <a:off x="9951720" y="6455664"/>
+            <a:ext cx="2011680" cy="292608"/>
           </a:xfrm>
           <a:prstGeom prst="rect">
             <a:avLst/>
           </a:prstGeom>
           <a:noFill/>
-          <a:ln/>
-        </p:spPr>
-        <p:txBody>
-          <a:bodyPr wrap="square" lIns="0" tIns="0" rIns="0" bIns="0" rtlCol="0" anchor="ctr"/>
-          <a:lstStyle/>
-          <a:p>
-            <a:pPr algn="l" indent="0" marL="0">
-              <a:buNone/>
-            </a:pPr>
-            <a:r>
-              <a:rPr lang="en-US" sz="900" dirty="0">
-                <a:solidFill>
-                  <a:srgbClr val="5D5D72"/>
-                </a:solidFill>
-                <a:latin typeface="Calibri" pitchFamily="34" charset="0"/>
-                <a:ea typeface="Calibri" pitchFamily="34" charset="-122"/>
-                <a:cs typeface="Calibri" pitchFamily="34" charset="-120"/>
-              </a:rPr>
-              <a:t>Usman Akram  •  COMSATS University Islamabad</a:t>
-            </a:r>
-            <a:endParaRPr lang="en-US" sz="900" dirty="0"/>
-          </a:p>
-        </p:txBody>
-      </p:sp>
-      <p:sp>
-        <p:nvSpPr>
-          <p:cNvPr id="20" name="Text 18"/>
-          <p:cNvSpPr txBox="1"/>
-          <p:nvPr/>
-        </p:nvSpPr>
-        <p:spPr>
-          <a:xfrm>
-            <a:off x="11155680" y="6446520"/>
-            <a:ext cx="457200" cy="292608"/>
-          </a:xfrm>
-          <a:prstGeom prst="rect">
-            <a:avLst/>
-          </a:prstGeom>
-          <a:noFill/>
-          <a:ln/>
-        </p:spPr>
-        <p:txBody>
-          <a:bodyPr wrap="square" lIns="0" tIns="0" rIns="0" bIns="0" rtlCol="0" anchor="ctr"/>
-          <a:lstStyle/>
-          <a:p>
-            <a:pPr algn="r" indent="0" marL="0">
-              <a:buNone/>
-            </a:pPr>
-            <a:r>
-              <a:rPr lang="en-US" sz="900" dirty="0">
-                <a:solidFill>
-                  <a:srgbClr val="5D5D72"/>
-                </a:solidFill>
-                <a:latin typeface="Calibri" pitchFamily="34" charset="0"/>
-                <a:ea typeface="Calibri" pitchFamily="34" charset="-122"/>
-                <a:cs typeface="Calibri" pitchFamily="34" charset="-120"/>
-              </a:rPr>
-              <a:t>2</a:t>
-            </a:r>
-            <a:endParaRPr lang="en-US" sz="900" dirty="0"/>
+        </p:spPr>
+        <p:txBody>
+          <a:bodyPr wrap="none" lIns="0" rIns="0" tIns="0" bIns="0">
+            <a:spAutoFit/>
+          </a:bodyPr>
+          <a:lstStyle/>
+          <a:p>
+            <a:pPr algn="r"/>
+            <a:r>
+              <a:rPr sz="1000">
+                <a:solidFill>
+                  <a:srgbClr val="8A939B"/>
+                </a:solidFill>
+                <a:hlinkClick r:id="rId3"/>
+              </a:rPr>
+              <a:t>cuinotes.com</a:t>
+            </a:r>
+            <a:r>
+              <a:rPr sz="1000">
+                <a:solidFill>
+                  <a:srgbClr val="8A939B"/>
+                </a:solidFill>
+              </a:rPr>
+              <a:t>  ·  2</a:t>
+            </a:r>
           </a:p>
         </p:txBody>
       </p:sp>
@@ -9174,6 +8838,10 @@
           </a:solidFill>
           <a:ln/>
         </p:spPr>
+        <p:txBody>
+          <a:bodyPr/>
+          <a:p/>
+        </p:txBody>
       </p:sp>
       <p:sp>
         <p:nvSpPr>
@@ -9498,79 +9166,44 @@
       </p:sp>
       <p:sp>
         <p:nvSpPr>
-          <p:cNvPr id="7" name="Text 5"/>
+          <p:cNvPr id="9" name="cuinotes-footer-mark"/>
           <p:cNvSpPr txBox="1"/>
           <p:nvPr/>
         </p:nvSpPr>
         <p:spPr>
           <a:xfrm>
-            <a:off x="640080" y="6446520"/>
-            <a:ext cx="8686800" cy="292608"/>
+            <a:off x="9951720" y="6455664"/>
+            <a:ext cx="2011680" cy="292608"/>
           </a:xfrm>
           <a:prstGeom prst="rect">
             <a:avLst/>
           </a:prstGeom>
           <a:noFill/>
-          <a:ln/>
-        </p:spPr>
-        <p:txBody>
-          <a:bodyPr wrap="square" lIns="0" tIns="0" rIns="0" bIns="0" rtlCol="0" anchor="ctr"/>
-          <a:lstStyle/>
-          <a:p>
-            <a:pPr algn="l" indent="0" marL="0">
-              <a:buNone/>
-            </a:pPr>
-            <a:r>
-              <a:rPr lang="en-US" sz="900" dirty="0">
-                <a:solidFill>
-                  <a:srgbClr val="5D5D72"/>
-                </a:solidFill>
-                <a:latin typeface="Calibri" pitchFamily="34" charset="0"/>
-                <a:ea typeface="Calibri" pitchFamily="34" charset="-122"/>
-                <a:cs typeface="Calibri" pitchFamily="34" charset="-120"/>
-              </a:rPr>
-              <a:t>Usman Akram  •  COMSATS University Islamabad</a:t>
-            </a:r>
-            <a:endParaRPr lang="en-US" sz="900" dirty="0"/>
-          </a:p>
-        </p:txBody>
-      </p:sp>
-      <p:sp>
-        <p:nvSpPr>
-          <p:cNvPr id="8" name="Text 6"/>
-          <p:cNvSpPr txBox="1"/>
-          <p:nvPr/>
-        </p:nvSpPr>
-        <p:spPr>
-          <a:xfrm>
-            <a:off x="11155680" y="6446520"/>
-            <a:ext cx="457200" cy="292608"/>
-          </a:xfrm>
-          <a:prstGeom prst="rect">
-            <a:avLst/>
-          </a:prstGeom>
-          <a:noFill/>
-          <a:ln/>
-        </p:spPr>
-        <p:txBody>
-          <a:bodyPr wrap="square" lIns="0" tIns="0" rIns="0" bIns="0" rtlCol="0" anchor="ctr"/>
-          <a:lstStyle/>
-          <a:p>
-            <a:pPr algn="r" indent="0" marL="0">
-              <a:buNone/>
-            </a:pPr>
-            <a:r>
-              <a:rPr lang="en-US" sz="900" dirty="0">
-                <a:solidFill>
-                  <a:srgbClr val="5D5D72"/>
-                </a:solidFill>
-                <a:latin typeface="Calibri" pitchFamily="34" charset="0"/>
-                <a:ea typeface="Calibri" pitchFamily="34" charset="-122"/>
-                <a:cs typeface="Calibri" pitchFamily="34" charset="-120"/>
-              </a:rPr>
-              <a:t>20</a:t>
-            </a:r>
-            <a:endParaRPr lang="en-US" sz="900" dirty="0"/>
+        </p:spPr>
+        <p:txBody>
+          <a:bodyPr wrap="none" lIns="0" rIns="0" tIns="0" bIns="0">
+            <a:spAutoFit/>
+          </a:bodyPr>
+          <a:lstStyle/>
+          <a:p>
+            <a:pPr algn="r"/>
+            <a:r>
+              <a:rPr sz="1000">
+                <a:solidFill>
+                  <a:srgbClr val="8A939B"/>
+                </a:solidFill>
+                <a:hlinkClick r:id="rId3"/>
+              </a:rPr>
+              <a:t>cuinotes.com</a:t>
+            </a:r>
+            <a:r>
+              <a:rPr sz="1000">
+                <a:solidFill>
+                  <a:srgbClr val="8A939B"/>
+                </a:solidFill>
+              </a:rPr>
+              <a:t>  ·  20</a:t>
+            </a:r>
           </a:p>
         </p:txBody>
       </p:sp>
@@ -9710,6 +9343,10 @@
             <a:prstDash val="solid"/>
           </a:ln>
         </p:spPr>
+        <p:txBody>
+          <a:bodyPr/>
+          <a:p/>
+        </p:txBody>
       </p:sp>
       <p:sp>
         <p:nvSpPr>
@@ -9791,79 +9428,44 @@
       </p:sp>
       <p:sp>
         <p:nvSpPr>
-          <p:cNvPr id="7" name="Text 5"/>
+          <p:cNvPr id="9" name="cuinotes-footer-mark"/>
           <p:cNvSpPr txBox="1"/>
           <p:nvPr/>
         </p:nvSpPr>
         <p:spPr>
           <a:xfrm>
-            <a:off x="640080" y="6446520"/>
-            <a:ext cx="8686800" cy="292608"/>
+            <a:off x="9951720" y="6455664"/>
+            <a:ext cx="2011680" cy="292608"/>
           </a:xfrm>
           <a:prstGeom prst="rect">
             <a:avLst/>
           </a:prstGeom>
           <a:noFill/>
-          <a:ln/>
-        </p:spPr>
-        <p:txBody>
-          <a:bodyPr wrap="square" lIns="0" tIns="0" rIns="0" bIns="0" rtlCol="0" anchor="ctr"/>
-          <a:lstStyle/>
-          <a:p>
-            <a:pPr algn="l" indent="0" marL="0">
-              <a:buNone/>
-            </a:pPr>
-            <a:r>
-              <a:rPr lang="en-US" sz="900" dirty="0">
-                <a:solidFill>
-                  <a:srgbClr val="5D5D72"/>
-                </a:solidFill>
-                <a:latin typeface="Calibri" pitchFamily="34" charset="0"/>
-                <a:ea typeface="Calibri" pitchFamily="34" charset="-122"/>
-                <a:cs typeface="Calibri" pitchFamily="34" charset="-120"/>
-              </a:rPr>
-              <a:t>Usman Akram  •  COMSATS University Islamabad</a:t>
-            </a:r>
-            <a:endParaRPr lang="en-US" sz="900" dirty="0"/>
-          </a:p>
-        </p:txBody>
-      </p:sp>
-      <p:sp>
-        <p:nvSpPr>
-          <p:cNvPr id="8" name="Text 6"/>
-          <p:cNvSpPr txBox="1"/>
-          <p:nvPr/>
-        </p:nvSpPr>
-        <p:spPr>
-          <a:xfrm>
-            <a:off x="11155680" y="6446520"/>
-            <a:ext cx="457200" cy="292608"/>
-          </a:xfrm>
-          <a:prstGeom prst="rect">
-            <a:avLst/>
-          </a:prstGeom>
-          <a:noFill/>
-          <a:ln/>
-        </p:spPr>
-        <p:txBody>
-          <a:bodyPr wrap="square" lIns="0" tIns="0" rIns="0" bIns="0" rtlCol="0" anchor="ctr"/>
-          <a:lstStyle/>
-          <a:p>
-            <a:pPr algn="r" indent="0" marL="0">
-              <a:buNone/>
-            </a:pPr>
-            <a:r>
-              <a:rPr lang="en-US" sz="900" dirty="0">
-                <a:solidFill>
-                  <a:srgbClr val="5D5D72"/>
-                </a:solidFill>
-                <a:latin typeface="Calibri" pitchFamily="34" charset="0"/>
-                <a:ea typeface="Calibri" pitchFamily="34" charset="-122"/>
-                <a:cs typeface="Calibri" pitchFamily="34" charset="-120"/>
-              </a:rPr>
-              <a:t>21</a:t>
-            </a:r>
-            <a:endParaRPr lang="en-US" sz="900" dirty="0"/>
+        </p:spPr>
+        <p:txBody>
+          <a:bodyPr wrap="none" lIns="0" rIns="0" tIns="0" bIns="0">
+            <a:spAutoFit/>
+          </a:bodyPr>
+          <a:lstStyle/>
+          <a:p>
+            <a:pPr algn="r"/>
+            <a:r>
+              <a:rPr sz="1000">
+                <a:solidFill>
+                  <a:srgbClr val="8A939B"/>
+                </a:solidFill>
+                <a:hlinkClick r:id="rId3"/>
+              </a:rPr>
+              <a:t>cuinotes.com</a:t>
+            </a:r>
+            <a:r>
+              <a:rPr sz="1000">
+                <a:solidFill>
+                  <a:srgbClr val="8A939B"/>
+                </a:solidFill>
+              </a:rPr>
+              <a:t>  ·  21</a:t>
+            </a:r>
           </a:p>
         </p:txBody>
       </p:sp>
@@ -9996,6 +9598,10 @@
           </a:solidFill>
           <a:ln/>
         </p:spPr>
+        <p:txBody>
+          <a:bodyPr/>
+          <a:p/>
+        </p:txBody>
       </p:sp>
       <p:sp>
         <p:nvSpPr>
@@ -10094,6 +9700,10 @@
           </a:solidFill>
           <a:ln/>
         </p:spPr>
+        <p:txBody>
+          <a:bodyPr/>
+          <a:p/>
+        </p:txBody>
       </p:sp>
       <p:sp>
         <p:nvSpPr>
@@ -10192,6 +9802,10 @@
           </a:solidFill>
           <a:ln/>
         </p:spPr>
+        <p:txBody>
+          <a:bodyPr/>
+          <a:p/>
+        </p:txBody>
       </p:sp>
       <p:sp>
         <p:nvSpPr>
@@ -10290,6 +9904,10 @@
           </a:solidFill>
           <a:ln/>
         </p:spPr>
+        <p:txBody>
+          <a:bodyPr/>
+          <a:p/>
+        </p:txBody>
       </p:sp>
       <p:sp>
         <p:nvSpPr>
@@ -10388,6 +10006,10 @@
           </a:solidFill>
           <a:ln/>
         </p:spPr>
+        <p:txBody>
+          <a:bodyPr/>
+          <a:p/>
+        </p:txBody>
       </p:sp>
       <p:sp>
         <p:nvSpPr>
@@ -10486,6 +10108,10 @@
           </a:solidFill>
           <a:ln/>
         </p:spPr>
+        <p:txBody>
+          <a:bodyPr/>
+          <a:p/>
+        </p:txBody>
       </p:sp>
       <p:sp>
         <p:nvSpPr>
@@ -10567,79 +10193,44 @@
       </p:sp>
       <p:sp>
         <p:nvSpPr>
-          <p:cNvPr id="22" name="Text 20"/>
+          <p:cNvPr id="24" name="cuinotes-footer-mark"/>
           <p:cNvSpPr txBox="1"/>
           <p:nvPr/>
         </p:nvSpPr>
         <p:spPr>
           <a:xfrm>
-            <a:off x="640080" y="6446520"/>
-            <a:ext cx="8686800" cy="292608"/>
+            <a:off x="9951720" y="6455664"/>
+            <a:ext cx="2011680" cy="292608"/>
           </a:xfrm>
           <a:prstGeom prst="rect">
             <a:avLst/>
           </a:prstGeom>
           <a:noFill/>
-          <a:ln/>
-        </p:spPr>
-        <p:txBody>
-          <a:bodyPr wrap="square" lIns="0" tIns="0" rIns="0" bIns="0" rtlCol="0" anchor="ctr"/>
-          <a:lstStyle/>
-          <a:p>
-            <a:pPr algn="l" indent="0" marL="0">
-              <a:buNone/>
-            </a:pPr>
-            <a:r>
-              <a:rPr lang="en-US" sz="900" dirty="0">
-                <a:solidFill>
-                  <a:srgbClr val="9AA3D8"/>
-                </a:solidFill>
-                <a:latin typeface="Calibri" pitchFamily="34" charset="0"/>
-                <a:ea typeface="Calibri" pitchFamily="34" charset="-122"/>
-                <a:cs typeface="Calibri" pitchFamily="34" charset="-120"/>
-              </a:rPr>
-              <a:t>Usman Akram  •  COMSATS University Islamabad</a:t>
-            </a:r>
-            <a:endParaRPr lang="en-US" sz="900" dirty="0"/>
-          </a:p>
-        </p:txBody>
-      </p:sp>
-      <p:sp>
-        <p:nvSpPr>
-          <p:cNvPr id="23" name="Text 21"/>
-          <p:cNvSpPr txBox="1"/>
-          <p:nvPr/>
-        </p:nvSpPr>
-        <p:spPr>
-          <a:xfrm>
-            <a:off x="11155680" y="6446520"/>
-            <a:ext cx="457200" cy="292608"/>
-          </a:xfrm>
-          <a:prstGeom prst="rect">
-            <a:avLst/>
-          </a:prstGeom>
-          <a:noFill/>
-          <a:ln/>
-        </p:spPr>
-        <p:txBody>
-          <a:bodyPr wrap="square" lIns="0" tIns="0" rIns="0" bIns="0" rtlCol="0" anchor="ctr"/>
-          <a:lstStyle/>
-          <a:p>
-            <a:pPr algn="r" indent="0" marL="0">
-              <a:buNone/>
-            </a:pPr>
-            <a:r>
-              <a:rPr lang="en-US" sz="900" dirty="0">
-                <a:solidFill>
-                  <a:srgbClr val="9AA3D8"/>
-                </a:solidFill>
-                <a:latin typeface="Calibri" pitchFamily="34" charset="0"/>
-                <a:ea typeface="Calibri" pitchFamily="34" charset="-122"/>
-                <a:cs typeface="Calibri" pitchFamily="34" charset="-120"/>
-              </a:rPr>
-              <a:t>22</a:t>
-            </a:r>
-            <a:endParaRPr lang="en-US" sz="900" dirty="0"/>
+        </p:spPr>
+        <p:txBody>
+          <a:bodyPr wrap="none" lIns="0" rIns="0" tIns="0" bIns="0">
+            <a:spAutoFit/>
+          </a:bodyPr>
+          <a:lstStyle/>
+          <a:p>
+            <a:pPr algn="r"/>
+            <a:r>
+              <a:rPr sz="1000">
+                <a:solidFill>
+                  <a:srgbClr val="8A939B"/>
+                </a:solidFill>
+                <a:hlinkClick r:id="rId3"/>
+              </a:rPr>
+              <a:t>cuinotes.com</a:t>
+            </a:r>
+            <a:r>
+              <a:rPr sz="1000">
+                <a:solidFill>
+                  <a:srgbClr val="8A939B"/>
+                </a:solidFill>
+              </a:rPr>
+              <a:t>  ·  22</a:t>
+            </a:r>
           </a:p>
         </p:txBody>
       </p:sp>
@@ -10772,6 +10363,10 @@
           </a:solidFill>
           <a:ln/>
         </p:spPr>
+        <p:txBody>
+          <a:bodyPr/>
+          <a:p/>
+        </p:txBody>
       </p:sp>
       <p:sp>
         <p:nvSpPr>
@@ -10870,6 +10465,10 @@
           </a:solidFill>
           <a:ln/>
         </p:spPr>
+        <p:txBody>
+          <a:bodyPr/>
+          <a:p/>
+        </p:txBody>
       </p:sp>
       <p:sp>
         <p:nvSpPr>
@@ -10968,6 +10567,10 @@
           </a:solidFill>
           <a:ln/>
         </p:spPr>
+        <p:txBody>
+          <a:bodyPr/>
+          <a:p/>
+        </p:txBody>
       </p:sp>
       <p:sp>
         <p:nvSpPr>
@@ -11049,79 +10652,44 @@
       </p:sp>
       <p:sp>
         <p:nvSpPr>
-          <p:cNvPr id="13" name="Text 11"/>
+          <p:cNvPr id="15" name="cuinotes-footer-mark"/>
           <p:cNvSpPr txBox="1"/>
           <p:nvPr/>
         </p:nvSpPr>
         <p:spPr>
           <a:xfrm>
-            <a:off x="640080" y="6446520"/>
-            <a:ext cx="8686800" cy="292608"/>
+            <a:off x="9951720" y="6455664"/>
+            <a:ext cx="2011680" cy="292608"/>
           </a:xfrm>
           <a:prstGeom prst="rect">
             <a:avLst/>
           </a:prstGeom>
           <a:noFill/>
-          <a:ln/>
-        </p:spPr>
-        <p:txBody>
-          <a:bodyPr wrap="square" lIns="0" tIns="0" rIns="0" bIns="0" rtlCol="0" anchor="ctr"/>
-          <a:lstStyle/>
-          <a:p>
-            <a:pPr algn="l" indent="0" marL="0">
-              <a:buNone/>
-            </a:pPr>
-            <a:r>
-              <a:rPr lang="en-US" sz="900" dirty="0">
-                <a:solidFill>
-                  <a:srgbClr val="5D5D72"/>
-                </a:solidFill>
-                <a:latin typeface="Calibri" pitchFamily="34" charset="0"/>
-                <a:ea typeface="Calibri" pitchFamily="34" charset="-122"/>
-                <a:cs typeface="Calibri" pitchFamily="34" charset="-120"/>
-              </a:rPr>
-              <a:t>Usman Akram  •  COMSATS University Islamabad</a:t>
-            </a:r>
-            <a:endParaRPr lang="en-US" sz="900" dirty="0"/>
-          </a:p>
-        </p:txBody>
-      </p:sp>
-      <p:sp>
-        <p:nvSpPr>
-          <p:cNvPr id="14" name="Text 12"/>
-          <p:cNvSpPr txBox="1"/>
-          <p:nvPr/>
-        </p:nvSpPr>
-        <p:spPr>
-          <a:xfrm>
-            <a:off x="11155680" y="6446520"/>
-            <a:ext cx="457200" cy="292608"/>
-          </a:xfrm>
-          <a:prstGeom prst="rect">
-            <a:avLst/>
-          </a:prstGeom>
-          <a:noFill/>
-          <a:ln/>
-        </p:spPr>
-        <p:txBody>
-          <a:bodyPr wrap="square" lIns="0" tIns="0" rIns="0" bIns="0" rtlCol="0" anchor="ctr"/>
-          <a:lstStyle/>
-          <a:p>
-            <a:pPr algn="r" indent="0" marL="0">
-              <a:buNone/>
-            </a:pPr>
-            <a:r>
-              <a:rPr lang="en-US" sz="900" dirty="0">
-                <a:solidFill>
-                  <a:srgbClr val="5D5D72"/>
-                </a:solidFill>
-                <a:latin typeface="Calibri" pitchFamily="34" charset="0"/>
-                <a:ea typeface="Calibri" pitchFamily="34" charset="-122"/>
-                <a:cs typeface="Calibri" pitchFamily="34" charset="-120"/>
-              </a:rPr>
-              <a:t>3</a:t>
-            </a:r>
-            <a:endParaRPr lang="en-US" sz="900" dirty="0"/>
+        </p:spPr>
+        <p:txBody>
+          <a:bodyPr wrap="none" lIns="0" rIns="0" tIns="0" bIns="0">
+            <a:spAutoFit/>
+          </a:bodyPr>
+          <a:lstStyle/>
+          <a:p>
+            <a:pPr algn="r"/>
+            <a:r>
+              <a:rPr sz="1000">
+                <a:solidFill>
+                  <a:srgbClr val="8A939B"/>
+                </a:solidFill>
+                <a:hlinkClick r:id="rId3"/>
+              </a:rPr>
+              <a:t>cuinotes.com</a:t>
+            </a:r>
+            <a:r>
+              <a:rPr sz="1000">
+                <a:solidFill>
+                  <a:srgbClr val="8A939B"/>
+                </a:solidFill>
+              </a:rPr>
+              <a:t>  ·  3</a:t>
+            </a:r>
           </a:p>
         </p:txBody>
       </p:sp>
@@ -11256,6 +10824,10 @@
           </a:solidFill>
           <a:ln/>
         </p:spPr>
+        <p:txBody>
+          <a:bodyPr/>
+          <a:p/>
+        </p:txBody>
       </p:sp>
       <p:sp>
         <p:nvSpPr>
@@ -11336,6 +10908,10 @@
             <a:tailEnd type="triangle"/>
           </a:ln>
         </p:spPr>
+        <p:txBody>
+          <a:bodyPr/>
+          <a:p/>
+        </p:txBody>
       </p:sp>
       <p:sp>
         <p:nvSpPr>
@@ -11358,6 +10934,10 @@
           </a:solidFill>
           <a:ln/>
         </p:spPr>
+        <p:txBody>
+          <a:bodyPr/>
+          <a:p/>
+        </p:txBody>
       </p:sp>
       <p:sp>
         <p:nvSpPr>
@@ -11438,6 +11018,10 @@
             <a:tailEnd type="triangle"/>
           </a:ln>
         </p:spPr>
+        <p:txBody>
+          <a:bodyPr/>
+          <a:p/>
+        </p:txBody>
       </p:sp>
       <p:sp>
         <p:nvSpPr>
@@ -11460,6 +11044,10 @@
           </a:solidFill>
           <a:ln/>
         </p:spPr>
+        <p:txBody>
+          <a:bodyPr/>
+          <a:p/>
+        </p:txBody>
       </p:sp>
       <p:sp>
         <p:nvSpPr>
@@ -11540,6 +11128,10 @@
             <a:tailEnd type="triangle"/>
           </a:ln>
         </p:spPr>
+        <p:txBody>
+          <a:bodyPr/>
+          <a:p/>
+        </p:txBody>
       </p:sp>
       <p:sp>
         <p:nvSpPr>
@@ -11562,6 +11154,10 @@
           </a:solidFill>
           <a:ln/>
         </p:spPr>
+        <p:txBody>
+          <a:bodyPr/>
+          <a:p/>
+        </p:txBody>
       </p:sp>
       <p:sp>
         <p:nvSpPr>
@@ -11642,6 +11238,10 @@
             <a:tailEnd type="triangle"/>
           </a:ln>
         </p:spPr>
+        <p:txBody>
+          <a:bodyPr/>
+          <a:p/>
+        </p:txBody>
       </p:sp>
       <p:sp>
         <p:nvSpPr>
@@ -11664,6 +11264,10 @@
           </a:solidFill>
           <a:ln/>
         </p:spPr>
+        <p:txBody>
+          <a:bodyPr/>
+          <a:p/>
+        </p:txBody>
       </p:sp>
       <p:sp>
         <p:nvSpPr>
@@ -11762,79 +11366,44 @@
       </p:sp>
       <p:sp>
         <p:nvSpPr>
-          <p:cNvPr id="19" name="Text 17"/>
+          <p:cNvPr id="21" name="cuinotes-footer-mark"/>
           <p:cNvSpPr txBox="1"/>
           <p:nvPr/>
         </p:nvSpPr>
         <p:spPr>
           <a:xfrm>
-            <a:off x="640080" y="6446520"/>
-            <a:ext cx="8686800" cy="292608"/>
+            <a:off x="9951720" y="6455664"/>
+            <a:ext cx="2011680" cy="292608"/>
           </a:xfrm>
           <a:prstGeom prst="rect">
             <a:avLst/>
           </a:prstGeom>
           <a:noFill/>
-          <a:ln/>
-        </p:spPr>
-        <p:txBody>
-          <a:bodyPr wrap="square" lIns="0" tIns="0" rIns="0" bIns="0" rtlCol="0" anchor="ctr"/>
-          <a:lstStyle/>
-          <a:p>
-            <a:pPr algn="l" indent="0" marL="0">
-              <a:buNone/>
-            </a:pPr>
-            <a:r>
-              <a:rPr lang="en-US" sz="900" dirty="0">
-                <a:solidFill>
-                  <a:srgbClr val="5D5D72"/>
-                </a:solidFill>
-                <a:latin typeface="Calibri" pitchFamily="34" charset="0"/>
-                <a:ea typeface="Calibri" pitchFamily="34" charset="-122"/>
-                <a:cs typeface="Calibri" pitchFamily="34" charset="-120"/>
-              </a:rPr>
-              <a:t>Usman Akram  •  COMSATS University Islamabad</a:t>
-            </a:r>
-            <a:endParaRPr lang="en-US" sz="900" dirty="0"/>
-          </a:p>
-        </p:txBody>
-      </p:sp>
-      <p:sp>
-        <p:nvSpPr>
-          <p:cNvPr id="20" name="Text 18"/>
-          <p:cNvSpPr txBox="1"/>
-          <p:nvPr/>
-        </p:nvSpPr>
-        <p:spPr>
-          <a:xfrm>
-            <a:off x="11155680" y="6446520"/>
-            <a:ext cx="457200" cy="292608"/>
-          </a:xfrm>
-          <a:prstGeom prst="rect">
-            <a:avLst/>
-          </a:prstGeom>
-          <a:noFill/>
-          <a:ln/>
-        </p:spPr>
-        <p:txBody>
-          <a:bodyPr wrap="square" lIns="0" tIns="0" rIns="0" bIns="0" rtlCol="0" anchor="ctr"/>
-          <a:lstStyle/>
-          <a:p>
-            <a:pPr algn="r" indent="0" marL="0">
-              <a:buNone/>
-            </a:pPr>
-            <a:r>
-              <a:rPr lang="en-US" sz="900" dirty="0">
-                <a:solidFill>
-                  <a:srgbClr val="5D5D72"/>
-                </a:solidFill>
-                <a:latin typeface="Calibri" pitchFamily="34" charset="0"/>
-                <a:ea typeface="Calibri" pitchFamily="34" charset="-122"/>
-                <a:cs typeface="Calibri" pitchFamily="34" charset="-120"/>
-              </a:rPr>
-              <a:t>4</a:t>
-            </a:r>
-            <a:endParaRPr lang="en-US" sz="900" dirty="0"/>
+        </p:spPr>
+        <p:txBody>
+          <a:bodyPr wrap="none" lIns="0" rIns="0" tIns="0" bIns="0">
+            <a:spAutoFit/>
+          </a:bodyPr>
+          <a:lstStyle/>
+          <a:p>
+            <a:pPr algn="r"/>
+            <a:r>
+              <a:rPr sz="1000">
+                <a:solidFill>
+                  <a:srgbClr val="8A939B"/>
+                </a:solidFill>
+                <a:hlinkClick r:id="rId3"/>
+              </a:rPr>
+              <a:t>cuinotes.com</a:t>
+            </a:r>
+            <a:r>
+              <a:rPr sz="1000">
+                <a:solidFill>
+                  <a:srgbClr val="8A939B"/>
+                </a:solidFill>
+              </a:rPr>
+              <a:t>  ·  4</a:t>
+            </a:r>
           </a:p>
         </p:txBody>
       </p:sp>
@@ -13217,79 +12786,44 @@
       </p:graphicFrame>
       <p:sp>
         <p:nvSpPr>
-          <p:cNvPr id="5" name="Text 2"/>
+          <p:cNvPr id="7" name="cuinotes-footer-mark"/>
           <p:cNvSpPr txBox="1"/>
           <p:nvPr/>
         </p:nvSpPr>
         <p:spPr>
           <a:xfrm>
-            <a:off x="640080" y="6446520"/>
-            <a:ext cx="8686800" cy="292608"/>
+            <a:off x="9951720" y="6455664"/>
+            <a:ext cx="2011680" cy="292608"/>
           </a:xfrm>
           <a:prstGeom prst="rect">
             <a:avLst/>
           </a:prstGeom>
           <a:noFill/>
-          <a:ln/>
-        </p:spPr>
-        <p:txBody>
-          <a:bodyPr wrap="square" lIns="0" tIns="0" rIns="0" bIns="0" rtlCol="0" anchor="ctr"/>
-          <a:lstStyle/>
-          <a:p>
-            <a:pPr algn="l" indent="0" marL="0">
-              <a:buNone/>
-            </a:pPr>
-            <a:r>
-              <a:rPr lang="en-US" sz="900" dirty="0">
-                <a:solidFill>
-                  <a:srgbClr val="5D5D72"/>
-                </a:solidFill>
-                <a:latin typeface="Calibri" pitchFamily="34" charset="0"/>
-                <a:ea typeface="Calibri" pitchFamily="34" charset="-122"/>
-                <a:cs typeface="Calibri" pitchFamily="34" charset="-120"/>
-              </a:rPr>
-              <a:t>Usman Akram  •  COMSATS University Islamabad</a:t>
-            </a:r>
-            <a:endParaRPr lang="en-US" sz="900" dirty="0"/>
-          </a:p>
-        </p:txBody>
-      </p:sp>
-      <p:sp>
-        <p:nvSpPr>
-          <p:cNvPr id="6" name="Text 3"/>
-          <p:cNvSpPr txBox="1"/>
-          <p:nvPr/>
-        </p:nvSpPr>
-        <p:spPr>
-          <a:xfrm>
-            <a:off x="11155680" y="6446520"/>
-            <a:ext cx="457200" cy="292608"/>
-          </a:xfrm>
-          <a:prstGeom prst="rect">
-            <a:avLst/>
-          </a:prstGeom>
-          <a:noFill/>
-          <a:ln/>
-        </p:spPr>
-        <p:txBody>
-          <a:bodyPr wrap="square" lIns="0" tIns="0" rIns="0" bIns="0" rtlCol="0" anchor="ctr"/>
-          <a:lstStyle/>
-          <a:p>
-            <a:pPr algn="r" indent="0" marL="0">
-              <a:buNone/>
-            </a:pPr>
-            <a:r>
-              <a:rPr lang="en-US" sz="900" dirty="0">
-                <a:solidFill>
-                  <a:srgbClr val="5D5D72"/>
-                </a:solidFill>
-                <a:latin typeface="Calibri" pitchFamily="34" charset="0"/>
-                <a:ea typeface="Calibri" pitchFamily="34" charset="-122"/>
-                <a:cs typeface="Calibri" pitchFamily="34" charset="-120"/>
-              </a:rPr>
-              <a:t>5</a:t>
-            </a:r>
-            <a:endParaRPr lang="en-US" sz="900" dirty="0"/>
+        </p:spPr>
+        <p:txBody>
+          <a:bodyPr wrap="none" lIns="0" rIns="0" tIns="0" bIns="0">
+            <a:spAutoFit/>
+          </a:bodyPr>
+          <a:lstStyle/>
+          <a:p>
+            <a:pPr algn="r"/>
+            <a:r>
+              <a:rPr sz="1000">
+                <a:solidFill>
+                  <a:srgbClr val="8A939B"/>
+                </a:solidFill>
+                <a:hlinkClick r:id="rId3"/>
+              </a:rPr>
+              <a:t>cuinotes.com</a:t>
+            </a:r>
+            <a:r>
+              <a:rPr sz="1000">
+                <a:solidFill>
+                  <a:srgbClr val="8A939B"/>
+                </a:solidFill>
+              </a:rPr>
+              <a:t>  ·  5</a:t>
+            </a:r>
           </a:p>
         </p:txBody>
       </p:sp>
@@ -13429,6 +12963,10 @@
             <a:prstDash val="solid"/>
           </a:ln>
         </p:spPr>
+        <p:txBody>
+          <a:bodyPr/>
+          <a:p/>
+        </p:txBody>
       </p:sp>
       <p:sp>
         <p:nvSpPr>
@@ -13510,79 +13048,44 @@
       </p:sp>
       <p:sp>
         <p:nvSpPr>
-          <p:cNvPr id="7" name="Text 5"/>
+          <p:cNvPr id="9" name="cuinotes-footer-mark"/>
           <p:cNvSpPr txBox="1"/>
           <p:nvPr/>
         </p:nvSpPr>
         <p:spPr>
           <a:xfrm>
-            <a:off x="640080" y="6446520"/>
-            <a:ext cx="8686800" cy="292608"/>
+            <a:off x="9951720" y="6455664"/>
+            <a:ext cx="2011680" cy="292608"/>
           </a:xfrm>
           <a:prstGeom prst="rect">
             <a:avLst/>
           </a:prstGeom>
           <a:noFill/>
-          <a:ln/>
-        </p:spPr>
-        <p:txBody>
-          <a:bodyPr wrap="square" lIns="0" tIns="0" rIns="0" bIns="0" rtlCol="0" anchor="ctr"/>
-          <a:lstStyle/>
-          <a:p>
-            <a:pPr algn="l" indent="0" marL="0">
-              <a:buNone/>
-            </a:pPr>
-            <a:r>
-              <a:rPr lang="en-US" sz="900" dirty="0">
-                <a:solidFill>
-                  <a:srgbClr val="5D5D72"/>
-                </a:solidFill>
-                <a:latin typeface="Calibri" pitchFamily="34" charset="0"/>
-                <a:ea typeface="Calibri" pitchFamily="34" charset="-122"/>
-                <a:cs typeface="Calibri" pitchFamily="34" charset="-120"/>
-              </a:rPr>
-              <a:t>Usman Akram  •  COMSATS University Islamabad</a:t>
-            </a:r>
-            <a:endParaRPr lang="en-US" sz="900" dirty="0"/>
-          </a:p>
-        </p:txBody>
-      </p:sp>
-      <p:sp>
-        <p:nvSpPr>
-          <p:cNvPr id="8" name="Text 6"/>
-          <p:cNvSpPr txBox="1"/>
-          <p:nvPr/>
-        </p:nvSpPr>
-        <p:spPr>
-          <a:xfrm>
-            <a:off x="11155680" y="6446520"/>
-            <a:ext cx="457200" cy="292608"/>
-          </a:xfrm>
-          <a:prstGeom prst="rect">
-            <a:avLst/>
-          </a:prstGeom>
-          <a:noFill/>
-          <a:ln/>
-        </p:spPr>
-        <p:txBody>
-          <a:bodyPr wrap="square" lIns="0" tIns="0" rIns="0" bIns="0" rtlCol="0" anchor="ctr"/>
-          <a:lstStyle/>
-          <a:p>
-            <a:pPr algn="r" indent="0" marL="0">
-              <a:buNone/>
-            </a:pPr>
-            <a:r>
-              <a:rPr lang="en-US" sz="900" dirty="0">
-                <a:solidFill>
-                  <a:srgbClr val="5D5D72"/>
-                </a:solidFill>
-                <a:latin typeface="Calibri" pitchFamily="34" charset="0"/>
-                <a:ea typeface="Calibri" pitchFamily="34" charset="-122"/>
-                <a:cs typeface="Calibri" pitchFamily="34" charset="-120"/>
-              </a:rPr>
-              <a:t>6</a:t>
-            </a:r>
-            <a:endParaRPr lang="en-US" sz="900" dirty="0"/>
+        </p:spPr>
+        <p:txBody>
+          <a:bodyPr wrap="none" lIns="0" rIns="0" tIns="0" bIns="0">
+            <a:spAutoFit/>
+          </a:bodyPr>
+          <a:lstStyle/>
+          <a:p>
+            <a:pPr algn="r"/>
+            <a:r>
+              <a:rPr sz="1000">
+                <a:solidFill>
+                  <a:srgbClr val="8A939B"/>
+                </a:solidFill>
+                <a:hlinkClick r:id="rId3"/>
+              </a:rPr>
+              <a:t>cuinotes.com</a:t>
+            </a:r>
+            <a:r>
+              <a:rPr sz="1000">
+                <a:solidFill>
+                  <a:srgbClr val="8A939B"/>
+                </a:solidFill>
+              </a:rPr>
+              <a:t>  ·  6</a:t>
+            </a:r>
           </a:p>
         </p:txBody>
       </p:sp>
@@ -13717,6 +13220,10 @@
           </a:solidFill>
           <a:ln/>
         </p:spPr>
+        <p:txBody>
+          <a:bodyPr/>
+          <a:p/>
+        </p:txBody>
       </p:sp>
       <p:sp>
         <p:nvSpPr>
@@ -13801,79 +13308,44 @@
       </p:sp>
       <p:sp>
         <p:nvSpPr>
-          <p:cNvPr id="7" name="Text 5"/>
+          <p:cNvPr id="9" name="cuinotes-footer-mark"/>
           <p:cNvSpPr txBox="1"/>
           <p:nvPr/>
         </p:nvSpPr>
         <p:spPr>
           <a:xfrm>
-            <a:off x="640080" y="6446520"/>
-            <a:ext cx="8686800" cy="292608"/>
+            <a:off x="9951720" y="6455664"/>
+            <a:ext cx="2011680" cy="292608"/>
           </a:xfrm>
           <a:prstGeom prst="rect">
             <a:avLst/>
           </a:prstGeom>
           <a:noFill/>
-          <a:ln/>
-        </p:spPr>
-        <p:txBody>
-          <a:bodyPr wrap="square" lIns="0" tIns="0" rIns="0" bIns="0" rtlCol="0" anchor="ctr"/>
-          <a:lstStyle/>
-          <a:p>
-            <a:pPr algn="l" indent="0" marL="0">
-              <a:buNone/>
-            </a:pPr>
-            <a:r>
-              <a:rPr lang="en-US" sz="900" dirty="0">
-                <a:solidFill>
-                  <a:srgbClr val="5D5D72"/>
-                </a:solidFill>
-                <a:latin typeface="Calibri" pitchFamily="34" charset="0"/>
-                <a:ea typeface="Calibri" pitchFamily="34" charset="-122"/>
-                <a:cs typeface="Calibri" pitchFamily="34" charset="-120"/>
-              </a:rPr>
-              <a:t>Usman Akram  •  COMSATS University Islamabad</a:t>
-            </a:r>
-            <a:endParaRPr lang="en-US" sz="900" dirty="0"/>
-          </a:p>
-        </p:txBody>
-      </p:sp>
-      <p:sp>
-        <p:nvSpPr>
-          <p:cNvPr id="8" name="Text 6"/>
-          <p:cNvSpPr txBox="1"/>
-          <p:nvPr/>
-        </p:nvSpPr>
-        <p:spPr>
-          <a:xfrm>
-            <a:off x="11155680" y="6446520"/>
-            <a:ext cx="457200" cy="292608"/>
-          </a:xfrm>
-          <a:prstGeom prst="rect">
-            <a:avLst/>
-          </a:prstGeom>
-          <a:noFill/>
-          <a:ln/>
-        </p:spPr>
-        <p:txBody>
-          <a:bodyPr wrap="square" lIns="0" tIns="0" rIns="0" bIns="0" rtlCol="0" anchor="ctr"/>
-          <a:lstStyle/>
-          <a:p>
-            <a:pPr algn="r" indent="0" marL="0">
-              <a:buNone/>
-            </a:pPr>
-            <a:r>
-              <a:rPr lang="en-US" sz="900" dirty="0">
-                <a:solidFill>
-                  <a:srgbClr val="5D5D72"/>
-                </a:solidFill>
-                <a:latin typeface="Calibri" pitchFamily="34" charset="0"/>
-                <a:ea typeface="Calibri" pitchFamily="34" charset="-122"/>
-                <a:cs typeface="Calibri" pitchFamily="34" charset="-120"/>
-              </a:rPr>
-              <a:t>7</a:t>
-            </a:r>
-            <a:endParaRPr lang="en-US" sz="900" dirty="0"/>
+        </p:spPr>
+        <p:txBody>
+          <a:bodyPr wrap="none" lIns="0" rIns="0" tIns="0" bIns="0">
+            <a:spAutoFit/>
+          </a:bodyPr>
+          <a:lstStyle/>
+          <a:p>
+            <a:pPr algn="r"/>
+            <a:r>
+              <a:rPr sz="1000">
+                <a:solidFill>
+                  <a:srgbClr val="8A939B"/>
+                </a:solidFill>
+                <a:hlinkClick r:id="rId3"/>
+              </a:rPr>
+              <a:t>cuinotes.com</a:t>
+            </a:r>
+            <a:r>
+              <a:rPr sz="1000">
+                <a:solidFill>
+                  <a:srgbClr val="8A939B"/>
+                </a:solidFill>
+              </a:rPr>
+              <a:t>  ·  7</a:t>
+            </a:r>
           </a:p>
         </p:txBody>
       </p:sp>
@@ -15050,79 +14522,44 @@
       </p:graphicFrame>
       <p:sp>
         <p:nvSpPr>
-          <p:cNvPr id="5" name="Text 2"/>
+          <p:cNvPr id="10" name="cuinotes-footer-mark"/>
           <p:cNvSpPr txBox="1"/>
           <p:nvPr/>
         </p:nvSpPr>
         <p:spPr>
           <a:xfrm>
-            <a:off x="640080" y="6446520"/>
-            <a:ext cx="8686800" cy="292608"/>
+            <a:off x="9951720" y="6455664"/>
+            <a:ext cx="2011680" cy="292608"/>
           </a:xfrm>
           <a:prstGeom prst="rect">
             <a:avLst/>
           </a:prstGeom>
           <a:noFill/>
-          <a:ln/>
-        </p:spPr>
-        <p:txBody>
-          <a:bodyPr wrap="square" lIns="0" tIns="0" rIns="0" bIns="0" rtlCol="0" anchor="ctr"/>
-          <a:lstStyle/>
-          <a:p>
-            <a:pPr algn="l" indent="0" marL="0">
-              <a:buNone/>
-            </a:pPr>
-            <a:r>
-              <a:rPr lang="en-US" sz="900" dirty="0">
-                <a:solidFill>
-                  <a:srgbClr val="5D5D72"/>
-                </a:solidFill>
-                <a:latin typeface="Calibri" pitchFamily="34" charset="0"/>
-                <a:ea typeface="Calibri" pitchFamily="34" charset="-122"/>
-                <a:cs typeface="Calibri" pitchFamily="34" charset="-120"/>
-              </a:rPr>
-              <a:t>Usman Akram  •  COMSATS University Islamabad</a:t>
-            </a:r>
-            <a:endParaRPr lang="en-US" sz="900" dirty="0"/>
-          </a:p>
-        </p:txBody>
-      </p:sp>
-      <p:sp>
-        <p:nvSpPr>
-          <p:cNvPr id="6" name="Text 3"/>
-          <p:cNvSpPr txBox="1"/>
-          <p:nvPr/>
-        </p:nvSpPr>
-        <p:spPr>
-          <a:xfrm>
-            <a:off x="11155680" y="6446520"/>
-            <a:ext cx="457200" cy="292608"/>
-          </a:xfrm>
-          <a:prstGeom prst="rect">
-            <a:avLst/>
-          </a:prstGeom>
-          <a:noFill/>
-          <a:ln/>
-        </p:spPr>
-        <p:txBody>
-          <a:bodyPr wrap="square" lIns="0" tIns="0" rIns="0" bIns="0" rtlCol="0" anchor="ctr"/>
-          <a:lstStyle/>
-          <a:p>
-            <a:pPr algn="r" indent="0" marL="0">
-              <a:buNone/>
-            </a:pPr>
-            <a:r>
-              <a:rPr lang="en-US" sz="900" dirty="0">
-                <a:solidFill>
-                  <a:srgbClr val="5D5D72"/>
-                </a:solidFill>
-                <a:latin typeface="Calibri" pitchFamily="34" charset="0"/>
-                <a:ea typeface="Calibri" pitchFamily="34" charset="-122"/>
-                <a:cs typeface="Calibri" pitchFamily="34" charset="-120"/>
-              </a:rPr>
-              <a:t>8</a:t>
-            </a:r>
-            <a:endParaRPr lang="en-US" sz="900" dirty="0"/>
+        </p:spPr>
+        <p:txBody>
+          <a:bodyPr wrap="none" lIns="0" rIns="0" tIns="0" bIns="0">
+            <a:spAutoFit/>
+          </a:bodyPr>
+          <a:lstStyle/>
+          <a:p>
+            <a:pPr algn="r"/>
+            <a:r>
+              <a:rPr sz="1000">
+                <a:solidFill>
+                  <a:srgbClr val="8A939B"/>
+                </a:solidFill>
+                <a:hlinkClick r:id="rId3"/>
+              </a:rPr>
+              <a:t>cuinotes.com</a:t>
+            </a:r>
+            <a:r>
+              <a:rPr sz="1000">
+                <a:solidFill>
+                  <a:srgbClr val="8A939B"/>
+                </a:solidFill>
+              </a:rPr>
+              <a:t>  ·  8</a:t>
+            </a:r>
           </a:p>
         </p:txBody>
       </p:sp>
@@ -16917,79 +16354,44 @@
       </p:graphicFrame>
       <p:sp>
         <p:nvSpPr>
-          <p:cNvPr id="5" name="Text 2"/>
+          <p:cNvPr id="11" name="cuinotes-footer-mark"/>
           <p:cNvSpPr txBox="1"/>
           <p:nvPr/>
         </p:nvSpPr>
         <p:spPr>
           <a:xfrm>
-            <a:off x="640080" y="6446520"/>
-            <a:ext cx="8686800" cy="292608"/>
+            <a:off x="9951720" y="6455664"/>
+            <a:ext cx="2011680" cy="292608"/>
           </a:xfrm>
           <a:prstGeom prst="rect">
             <a:avLst/>
           </a:prstGeom>
           <a:noFill/>
-          <a:ln/>
-        </p:spPr>
-        <p:txBody>
-          <a:bodyPr wrap="square" lIns="0" tIns="0" rIns="0" bIns="0" rtlCol="0" anchor="ctr"/>
-          <a:lstStyle/>
-          <a:p>
-            <a:pPr algn="l" indent="0" marL="0">
-              <a:buNone/>
-            </a:pPr>
-            <a:r>
-              <a:rPr lang="en-US" sz="900" dirty="0">
-                <a:solidFill>
-                  <a:srgbClr val="5D5D72"/>
-                </a:solidFill>
-                <a:latin typeface="Calibri" pitchFamily="34" charset="0"/>
-                <a:ea typeface="Calibri" pitchFamily="34" charset="-122"/>
-                <a:cs typeface="Calibri" pitchFamily="34" charset="-120"/>
-              </a:rPr>
-              <a:t>Usman Akram  •  COMSATS University Islamabad</a:t>
-            </a:r>
-            <a:endParaRPr lang="en-US" sz="900" dirty="0"/>
-          </a:p>
-        </p:txBody>
-      </p:sp>
-      <p:sp>
-        <p:nvSpPr>
-          <p:cNvPr id="6" name="Text 3"/>
-          <p:cNvSpPr txBox="1"/>
-          <p:nvPr/>
-        </p:nvSpPr>
-        <p:spPr>
-          <a:xfrm>
-            <a:off x="11155680" y="6446520"/>
-            <a:ext cx="457200" cy="292608"/>
-          </a:xfrm>
-          <a:prstGeom prst="rect">
-            <a:avLst/>
-          </a:prstGeom>
-          <a:noFill/>
-          <a:ln/>
-        </p:spPr>
-        <p:txBody>
-          <a:bodyPr wrap="square" lIns="0" tIns="0" rIns="0" bIns="0" rtlCol="0" anchor="ctr"/>
-          <a:lstStyle/>
-          <a:p>
-            <a:pPr algn="r" indent="0" marL="0">
-              <a:buNone/>
-            </a:pPr>
-            <a:r>
-              <a:rPr lang="en-US" sz="900" dirty="0">
-                <a:solidFill>
-                  <a:srgbClr val="5D5D72"/>
-                </a:solidFill>
-                <a:latin typeface="Calibri" pitchFamily="34" charset="0"/>
-                <a:ea typeface="Calibri" pitchFamily="34" charset="-122"/>
-                <a:cs typeface="Calibri" pitchFamily="34" charset="-120"/>
-              </a:rPr>
-              <a:t>9</a:t>
-            </a:r>
-            <a:endParaRPr lang="en-US" sz="900" dirty="0"/>
+        </p:spPr>
+        <p:txBody>
+          <a:bodyPr wrap="none" lIns="0" rIns="0" tIns="0" bIns="0">
+            <a:spAutoFit/>
+          </a:bodyPr>
+          <a:lstStyle/>
+          <a:p>
+            <a:pPr algn="r"/>
+            <a:r>
+              <a:rPr sz="1000">
+                <a:solidFill>
+                  <a:srgbClr val="8A939B"/>
+                </a:solidFill>
+                <a:hlinkClick r:id="rId3"/>
+              </a:rPr>
+              <a:t>cuinotes.com</a:t>
+            </a:r>
+            <a:r>
+              <a:rPr sz="1000">
+                <a:solidFill>
+                  <a:srgbClr val="8A939B"/>
+                </a:solidFill>
+              </a:rPr>
+              <a:t>  ·  9</a:t>
+            </a:r>
           </a:p>
         </p:txBody>
       </p:sp>

--- a/slides/CSC336-Lecture-19-HTTP-Status-Codes-and-Headers.pptx
+++ b/slides/CSC336-Lecture-19-HTTP-Status-Codes-and-Headers.pptx
@@ -3085,7 +3085,7 @@
         <p:spPr>
           <a:xfrm>
             <a:off x="640080" y="1965960"/>
-            <a:ext cx="10911535" cy="2103120"/>
+            <a:ext cx="10911535" cy="3657600"/>
           </a:xfrm>
           <a:prstGeom prst="roundRect">
             <a:avLst>
@@ -3116,7 +3116,7 @@
         <p:spPr>
           <a:xfrm>
             <a:off x="868680" y="2103120"/>
-            <a:ext cx="10454335" cy="274320"/>
+            <a:ext cx="10454335" cy="400000"/>
           </a:xfrm>
           <a:prstGeom prst="rect">
             <a:avLst/>
@@ -3132,7 +3132,7 @@
               <a:buNone/>
             </a:pPr>
             <a:r>
-              <a:rPr lang="en-US" sz="1000" b="1" spc="200" kern="0" dirty="0">
+              <a:rPr lang="en-US" sz="1800" b="1" spc="200" kern="0" dirty="0">
                 <a:solidFill>
                   <a:srgbClr val="8A3A12"/>
                 </a:solidFill>
@@ -3142,7 +3142,7 @@
               </a:rPr>
               <a:t>WARNING</a:t>
             </a:r>
-            <a:endParaRPr lang="en-US" sz="1000" dirty="0"/>
+            <a:endParaRPr lang="en-US" sz="1800" dirty="0"/>
           </a:p>
         </p:txBody>
       </p:sp>
@@ -3154,8 +3154,8 @@
         </p:nvSpPr>
         <p:spPr>
           <a:xfrm>
-            <a:off x="868680" y="2404872"/>
-            <a:ext cx="10454335" cy="1508760"/>
+            <a:off x="868680" y="2795960"/>
+            <a:ext cx="10454335" cy="2500000"/>
           </a:xfrm>
           <a:prstGeom prst="rect">
             <a:avLst/>
@@ -3164,14 +3164,14 @@
           <a:ln/>
         </p:spPr>
         <p:txBody>
-          <a:bodyPr wrap="square" lIns="0" tIns="0" rIns="0" bIns="0" rtlCol="0" anchor="t"/>
+          <a:bodyPr wrap="square" lIns="0" tIns="0" rIns="0" bIns="0" rtlCol="0" anchor="ctr"/>
           <a:lstStyle/>
           <a:p>
             <a:pPr indent="0" marL="0">
               <a:buNone/>
             </a:pPr>
             <a:r>
-              <a:rPr lang="en-US" sz="1250" dirty="0">
+              <a:rPr lang="en-US" sz="2800" dirty="0">
                 <a:solidFill>
                   <a:srgbClr val="26262F"/>
                 </a:solidFill>
@@ -3181,7 +3181,7 @@
               </a:rPr>
               <a:t>401 Unauthorized really means "I don't know who you are" — not logged in, missing or invalid credentials. 403 Forbidden means "I know who you are, but you're not allowed to do this" — logged in, but insufficient permissions, like a regular user hitting an admin-only route. Many students use these interchangeably; exams and real APIs do not.</a:t>
             </a:r>
-            <a:endParaRPr lang="en-US" sz="1250" dirty="0"/>
+            <a:endParaRPr lang="en-US" sz="2800" dirty="0"/>
           </a:p>
         </p:txBody>
       </p:sp>
@@ -3347,7 +3347,7 @@
         <p:spPr>
           <a:xfrm>
             <a:off x="640080" y="1965960"/>
-            <a:ext cx="10911535" cy="2194560"/>
+            <a:ext cx="10911535" cy="3657600"/>
           </a:xfrm>
           <a:prstGeom prst="roundRect">
             <a:avLst>
@@ -3378,7 +3378,7 @@
         <p:spPr>
           <a:xfrm>
             <a:off x="868680" y="2103120"/>
-            <a:ext cx="10454335" cy="274320"/>
+            <a:ext cx="10454335" cy="400000"/>
           </a:xfrm>
           <a:prstGeom prst="rect">
             <a:avLst/>
@@ -3394,7 +3394,7 @@
               <a:buNone/>
             </a:pPr>
             <a:r>
-              <a:rPr lang="en-US" sz="1000" b="1" spc="200" kern="0" dirty="0">
+              <a:rPr lang="en-US" sz="1800" b="1" spc="200" kern="0" dirty="0">
                 <a:solidFill>
                   <a:srgbClr val="8A3A12"/>
                 </a:solidFill>
@@ -3404,7 +3404,7 @@
               </a:rPr>
               <a:t>WARNING</a:t>
             </a:r>
-            <a:endParaRPr lang="en-US" sz="1000" dirty="0"/>
+            <a:endParaRPr lang="en-US" sz="1800" dirty="0"/>
           </a:p>
         </p:txBody>
       </p:sp>
@@ -3416,8 +3416,8 @@
         </p:nvSpPr>
         <p:spPr>
           <a:xfrm>
-            <a:off x="868680" y="2404872"/>
-            <a:ext cx="10454335" cy="1600200"/>
+            <a:off x="868680" y="2795960"/>
+            <a:ext cx="10454335" cy="2500000"/>
           </a:xfrm>
           <a:prstGeom prst="rect">
             <a:avLst/>
@@ -3426,14 +3426,14 @@
           <a:ln/>
         </p:spPr>
         <p:txBody>
-          <a:bodyPr wrap="square" lIns="0" tIns="0" rIns="0" bIns="0" rtlCol="0" anchor="t"/>
+          <a:bodyPr wrap="square" lIns="0" tIns="0" rIns="0" bIns="0" rtlCol="0" anchor="ctr"/>
           <a:lstStyle/>
           <a:p>
             <a:pPr indent="0" marL="0">
               <a:buNone/>
             </a:pPr>
             <a:r>
-              <a:rPr lang="en-US" sz="1250" dirty="0">
+              <a:rPr lang="en-US" sz="2800" dirty="0">
                 <a:solidFill>
                   <a:srgbClr val="26262F"/>
                 </a:solidFill>
@@ -3443,7 +3443,7 @@
               </a:rPr>
               <a:t>400 typically means the request itself is malformed at a structural level — broken JSON, wrong content type. 422 means the request was structurally fine and understood, but the data inside it fails validation — e.g. age: -5, or a missing required field in otherwise-valid JSON. Not every API distinguishes these strictly, but you should understand the difference conceptually.</a:t>
             </a:r>
-            <a:endParaRPr lang="en-US" sz="1250" dirty="0"/>
+            <a:endParaRPr lang="en-US" sz="2800" dirty="0"/>
           </a:p>
         </p:txBody>
       </p:sp>
@@ -3617,9 +3617,13 @@
             </a:avLst>
           </a:prstGeom>
           <a:solidFill>
-            <a:srgbClr val="1E1E4C"/>
+            <a:srgbClr val="F7F8F9"/>
           </a:solidFill>
-          <a:ln/>
+          <a:ln w="9525">
+            <a:solidFill>
+              <a:srgbClr val="D0D5DD"/>
+            </a:solidFill>
+          </a:ln>
         </p:spPr>
         <p:txBody>
           <a:bodyPr/>
@@ -3656,7 +3660,7 @@
             <a:r>
               <a:rPr lang="en-US" sz="1000" dirty="0">
                 <a:solidFill>
-                  <a:srgbClr val="C9D3F5"/>
+                  <a:srgbClr val="1F2429"/>
                 </a:solidFill>
                 <a:latin typeface="Courier New" pitchFamily="34" charset="0"/>
                 <a:ea typeface="Courier New" pitchFamily="34" charset="-122"/>
@@ -3676,7 +3680,7 @@
             <a:r>
               <a:rPr lang="en-US" sz="1000" dirty="0">
                 <a:solidFill>
-                  <a:srgbClr val="C9D3F5"/>
+                  <a:srgbClr val="1F2429"/>
                 </a:solidFill>
                 <a:latin typeface="Courier New" pitchFamily="34" charset="0"/>
                 <a:ea typeface="Courier New" pitchFamily="34" charset="-122"/>
@@ -3705,7 +3709,7 @@
             <a:r>
               <a:rPr lang="en-US" sz="1000" dirty="0">
                 <a:solidFill>
-                  <a:srgbClr val="C9D3F5"/>
+                  <a:srgbClr val="1F2429"/>
                 </a:solidFill>
                 <a:latin typeface="Courier New" pitchFamily="34" charset="0"/>
                 <a:ea typeface="Courier New" pitchFamily="34" charset="-122"/>
@@ -3725,7 +3729,7 @@
             <a:r>
               <a:rPr lang="en-US" sz="1000" dirty="0">
                 <a:solidFill>
-                  <a:srgbClr val="C9D3F5"/>
+                  <a:srgbClr val="1F2429"/>
                 </a:solidFill>
                 <a:latin typeface="Courier New" pitchFamily="34" charset="0"/>
                 <a:ea typeface="Courier New" pitchFamily="34" charset="-122"/>
@@ -3745,7 +3749,7 @@
             <a:r>
               <a:rPr lang="en-US" sz="1000" dirty="0">
                 <a:solidFill>
-                  <a:srgbClr val="C9D3F5"/>
+                  <a:srgbClr val="1F2429"/>
                 </a:solidFill>
                 <a:latin typeface="Courier New" pitchFamily="34" charset="0"/>
                 <a:ea typeface="Courier New" pitchFamily="34" charset="-122"/>
@@ -3765,7 +3769,7 @@
             <a:r>
               <a:rPr lang="en-US" sz="1000" dirty="0">
                 <a:solidFill>
-                  <a:srgbClr val="C9D3F5"/>
+                  <a:srgbClr val="1F2429"/>
                 </a:solidFill>
                 <a:latin typeface="Courier New" pitchFamily="34" charset="0"/>
                 <a:ea typeface="Courier New" pitchFamily="34" charset="-122"/>
@@ -3785,7 +3789,7 @@
             <a:r>
               <a:rPr lang="en-US" sz="1000" dirty="0">
                 <a:solidFill>
-                  <a:srgbClr val="C9D3F5"/>
+                  <a:srgbClr val="1F2429"/>
                 </a:solidFill>
                 <a:latin typeface="Courier New" pitchFamily="34" charset="0"/>
                 <a:ea typeface="Courier New" pitchFamily="34" charset="-122"/>
@@ -3814,7 +3818,7 @@
             <a:r>
               <a:rPr lang="en-US" sz="1000" dirty="0">
                 <a:solidFill>
-                  <a:srgbClr val="C9D3F5"/>
+                  <a:srgbClr val="1F2429"/>
                 </a:solidFill>
                 <a:latin typeface="Courier New" pitchFamily="34" charset="0"/>
                 <a:ea typeface="Courier New" pitchFamily="34" charset="-122"/>
@@ -3843,7 +3847,7 @@
             <a:r>
               <a:rPr lang="en-US" sz="1000" dirty="0">
                 <a:solidFill>
-                  <a:srgbClr val="C9D3F5"/>
+                  <a:srgbClr val="1F2429"/>
                 </a:solidFill>
                 <a:latin typeface="Courier New" pitchFamily="34" charset="0"/>
                 <a:ea typeface="Courier New" pitchFamily="34" charset="-122"/>
@@ -3863,7 +3867,7 @@
             <a:r>
               <a:rPr lang="en-US" sz="1000" dirty="0">
                 <a:solidFill>
-                  <a:srgbClr val="C9D3F5"/>
+                  <a:srgbClr val="1F2429"/>
                 </a:solidFill>
                 <a:latin typeface="Courier New" pitchFamily="34" charset="0"/>
                 <a:ea typeface="Courier New" pitchFamily="34" charset="-122"/>
@@ -3883,7 +3887,7 @@
             <a:r>
               <a:rPr lang="en-US" sz="1000" dirty="0">
                 <a:solidFill>
-                  <a:srgbClr val="C9D3F5"/>
+                  <a:srgbClr val="1F2429"/>
                 </a:solidFill>
                 <a:latin typeface="Courier New" pitchFamily="34" charset="0"/>
                 <a:ea typeface="Courier New" pitchFamily="34" charset="-122"/>
@@ -3903,7 +3907,7 @@
             <a:r>
               <a:rPr lang="en-US" sz="1000" dirty="0">
                 <a:solidFill>
-                  <a:srgbClr val="C9D3F5"/>
+                  <a:srgbClr val="1F2429"/>
                 </a:solidFill>
                 <a:latin typeface="Courier New" pitchFamily="34" charset="0"/>
                 <a:ea typeface="Courier New" pitchFamily="34" charset="-122"/>
@@ -4124,9 +4128,13 @@
             </a:avLst>
           </a:prstGeom>
           <a:solidFill>
-            <a:srgbClr val="1E1E4C"/>
+            <a:srgbClr val="F7F8F9"/>
           </a:solidFill>
-          <a:ln/>
+          <a:ln w="9525">
+            <a:solidFill>
+              <a:srgbClr val="D0D5DD"/>
+            </a:solidFill>
+          </a:ln>
         </p:spPr>
         <p:txBody>
           <a:bodyPr/>
@@ -4163,7 +4171,7 @@
             <a:r>
               <a:rPr lang="en-US" sz="1029" dirty="0">
                 <a:solidFill>
-                  <a:srgbClr val="C9D3F5"/>
+                  <a:srgbClr val="1F2429"/>
                 </a:solidFill>
                 <a:latin typeface="Courier New" pitchFamily="34" charset="0"/>
                 <a:ea typeface="Courier New" pitchFamily="34" charset="-122"/>
@@ -4183,7 +4191,7 @@
             <a:r>
               <a:rPr lang="en-US" sz="1029" dirty="0">
                 <a:solidFill>
-                  <a:srgbClr val="C9D3F5"/>
+                  <a:srgbClr val="1F2429"/>
                 </a:solidFill>
                 <a:latin typeface="Courier New" pitchFamily="34" charset="0"/>
                 <a:ea typeface="Courier New" pitchFamily="34" charset="-122"/>
@@ -4203,7 +4211,7 @@
             <a:r>
               <a:rPr lang="en-US" sz="1029" dirty="0">
                 <a:solidFill>
-                  <a:srgbClr val="C9D3F5"/>
+                  <a:srgbClr val="1F2429"/>
                 </a:solidFill>
                 <a:latin typeface="Courier New" pitchFamily="34" charset="0"/>
                 <a:ea typeface="Courier New" pitchFamily="34" charset="-122"/>
@@ -4223,7 +4231,7 @@
             <a:r>
               <a:rPr lang="en-US" sz="1029" dirty="0">
                 <a:solidFill>
-                  <a:srgbClr val="C9D3F5"/>
+                  <a:srgbClr val="1F2429"/>
                 </a:solidFill>
                 <a:latin typeface="Courier New" pitchFamily="34" charset="0"/>
                 <a:ea typeface="Courier New" pitchFamily="34" charset="-122"/>
@@ -4252,7 +4260,7 @@
             <a:r>
               <a:rPr lang="en-US" sz="1029" dirty="0">
                 <a:solidFill>
-                  <a:srgbClr val="C9D3F5"/>
+                  <a:srgbClr val="1F2429"/>
                 </a:solidFill>
                 <a:latin typeface="Courier New" pitchFamily="34" charset="0"/>
                 <a:ea typeface="Courier New" pitchFamily="34" charset="-122"/>
@@ -4272,7 +4280,7 @@
             <a:r>
               <a:rPr lang="en-US" sz="1029" dirty="0">
                 <a:solidFill>
-                  <a:srgbClr val="C9D3F5"/>
+                  <a:srgbClr val="1F2429"/>
                 </a:solidFill>
                 <a:latin typeface="Courier New" pitchFamily="34" charset="0"/>
                 <a:ea typeface="Courier New" pitchFamily="34" charset="-122"/>
@@ -4292,7 +4300,7 @@
             <a:r>
               <a:rPr lang="en-US" sz="1029" dirty="0">
                 <a:solidFill>
-                  <a:srgbClr val="C9D3F5"/>
+                  <a:srgbClr val="1F2429"/>
                 </a:solidFill>
                 <a:latin typeface="Courier New" pitchFamily="34" charset="0"/>
                 <a:ea typeface="Courier New" pitchFamily="34" charset="-122"/>
@@ -4312,7 +4320,7 @@
             <a:r>
               <a:rPr lang="en-US" sz="1029" dirty="0">
                 <a:solidFill>
-                  <a:srgbClr val="C9D3F5"/>
+                  <a:srgbClr val="1F2429"/>
                 </a:solidFill>
                 <a:latin typeface="Courier New" pitchFamily="34" charset="0"/>
                 <a:ea typeface="Courier New" pitchFamily="34" charset="-122"/>
@@ -4332,7 +4340,7 @@
             <a:r>
               <a:rPr lang="en-US" sz="1029" dirty="0">
                 <a:solidFill>
-                  <a:srgbClr val="C9D3F5"/>
+                  <a:srgbClr val="1F2429"/>
                 </a:solidFill>
                 <a:latin typeface="Courier New" pitchFamily="34" charset="0"/>
                 <a:ea typeface="Courier New" pitchFamily="34" charset="-122"/>
@@ -4352,7 +4360,7 @@
             <a:r>
               <a:rPr lang="en-US" sz="1029" dirty="0">
                 <a:solidFill>
-                  <a:srgbClr val="C9D3F5"/>
+                  <a:srgbClr val="1F2429"/>
                 </a:solidFill>
                 <a:latin typeface="Courier New" pitchFamily="34" charset="0"/>
                 <a:ea typeface="Courier New" pitchFamily="34" charset="-122"/>
@@ -4372,7 +4380,7 @@
             <a:r>
               <a:rPr lang="en-US" sz="1029" dirty="0">
                 <a:solidFill>
-                  <a:srgbClr val="C9D3F5"/>
+                  <a:srgbClr val="1F2429"/>
                 </a:solidFill>
                 <a:latin typeface="Courier New" pitchFamily="34" charset="0"/>
                 <a:ea typeface="Courier New" pitchFamily="34" charset="-122"/>
@@ -4392,7 +4400,7 @@
             <a:r>
               <a:rPr lang="en-US" sz="1029" dirty="0">
                 <a:solidFill>
-                  <a:srgbClr val="C9D3F5"/>
+                  <a:srgbClr val="1F2429"/>
                 </a:solidFill>
                 <a:latin typeface="Courier New" pitchFamily="34" charset="0"/>
                 <a:ea typeface="Courier New" pitchFamily="34" charset="-122"/>
@@ -4412,7 +4420,7 @@
             <a:r>
               <a:rPr lang="en-US" sz="1029" dirty="0">
                 <a:solidFill>
-                  <a:srgbClr val="C9D3F5"/>
+                  <a:srgbClr val="1F2429"/>
                 </a:solidFill>
                 <a:latin typeface="Courier New" pitchFamily="34" charset="0"/>
                 <a:ea typeface="Courier New" pitchFamily="34" charset="-122"/>
@@ -5506,9 +5514,13 @@
             </a:avLst>
           </a:prstGeom>
           <a:solidFill>
-            <a:srgbClr val="1E1E4C"/>
+            <a:srgbClr val="F7F8F9"/>
           </a:solidFill>
-          <a:ln/>
+          <a:ln w="9525">
+            <a:solidFill>
+              <a:srgbClr val="D0D5DD"/>
+            </a:solidFill>
+          </a:ln>
         </p:spPr>
         <p:txBody>
           <a:bodyPr/>
@@ -5545,7 +5557,7 @@
             <a:r>
               <a:rPr lang="en-US" sz="1400" dirty="0">
                 <a:solidFill>
-                  <a:srgbClr val="C9D3F5"/>
+                  <a:srgbClr val="1F2429"/>
                 </a:solidFill>
                 <a:latin typeface="Courier New" pitchFamily="34" charset="0"/>
                 <a:ea typeface="Courier New" pitchFamily="34" charset="-122"/>
@@ -5565,7 +5577,7 @@
             <a:r>
               <a:rPr lang="en-US" sz="1400" dirty="0">
                 <a:solidFill>
-                  <a:srgbClr val="C9D3F5"/>
+                  <a:srgbClr val="1F2429"/>
                 </a:solidFill>
                 <a:latin typeface="Courier New" pitchFamily="34" charset="0"/>
                 <a:ea typeface="Courier New" pitchFamily="34" charset="-122"/>
@@ -5585,7 +5597,7 @@
             <a:r>
               <a:rPr lang="en-US" sz="1400" dirty="0">
                 <a:solidFill>
-                  <a:srgbClr val="C9D3F5"/>
+                  <a:srgbClr val="1F2429"/>
                 </a:solidFill>
                 <a:latin typeface="Courier New" pitchFamily="34" charset="0"/>
                 <a:ea typeface="Courier New" pitchFamily="34" charset="-122"/>
@@ -5605,7 +5617,7 @@
             <a:r>
               <a:rPr lang="en-US" sz="1400" dirty="0">
                 <a:solidFill>
-                  <a:srgbClr val="C9D3F5"/>
+                  <a:srgbClr val="1F2429"/>
                 </a:solidFill>
                 <a:latin typeface="Courier New" pitchFamily="34" charset="0"/>
                 <a:ea typeface="Courier New" pitchFamily="34" charset="-122"/>
@@ -5625,7 +5637,7 @@
             <a:r>
               <a:rPr lang="en-US" sz="1400" dirty="0">
                 <a:solidFill>
-                  <a:srgbClr val="C9D3F5"/>
+                  <a:srgbClr val="1F2429"/>
                 </a:solidFill>
                 <a:latin typeface="Courier New" pitchFamily="34" charset="0"/>
                 <a:ea typeface="Courier New" pitchFamily="34" charset="-122"/>
@@ -6719,9 +6731,13 @@
             </a:avLst>
           </a:prstGeom>
           <a:solidFill>
-            <a:srgbClr val="1E1E4C"/>
+            <a:srgbClr val="F7F8F9"/>
           </a:solidFill>
-          <a:ln/>
+          <a:ln w="9525">
+            <a:solidFill>
+              <a:srgbClr val="D0D5DD"/>
+            </a:solidFill>
+          </a:ln>
         </p:spPr>
         <p:txBody>
           <a:bodyPr/>
@@ -6758,7 +6774,7 @@
             <a:r>
               <a:rPr lang="en-US" sz="1400" dirty="0">
                 <a:solidFill>
-                  <a:srgbClr val="C9D3F5"/>
+                  <a:srgbClr val="1F2429"/>
                 </a:solidFill>
                 <a:latin typeface="Courier New" pitchFamily="34" charset="0"/>
                 <a:ea typeface="Courier New" pitchFamily="34" charset="-122"/>
@@ -6778,7 +6794,7 @@
             <a:r>
               <a:rPr lang="en-US" sz="1400" dirty="0">
                 <a:solidFill>
-                  <a:srgbClr val="C9D3F5"/>
+                  <a:srgbClr val="1F2429"/>
                 </a:solidFill>
                 <a:latin typeface="Courier New" pitchFamily="34" charset="0"/>
                 <a:ea typeface="Courier New" pitchFamily="34" charset="-122"/>
@@ -6798,7 +6814,7 @@
             <a:r>
               <a:rPr lang="en-US" sz="1400" dirty="0">
                 <a:solidFill>
-                  <a:srgbClr val="C9D3F5"/>
+                  <a:srgbClr val="1F2429"/>
                 </a:solidFill>
                 <a:latin typeface="Courier New" pitchFamily="34" charset="0"/>
                 <a:ea typeface="Courier New" pitchFamily="34" charset="-122"/>
@@ -6818,7 +6834,7 @@
             <a:r>
               <a:rPr lang="en-US" sz="1400" dirty="0">
                 <a:solidFill>
-                  <a:srgbClr val="C9D3F5"/>
+                  <a:srgbClr val="1F2429"/>
                 </a:solidFill>
                 <a:latin typeface="Courier New" pitchFamily="34" charset="0"/>
                 <a:ea typeface="Courier New" pitchFamily="34" charset="-122"/>
@@ -6847,7 +6863,7 @@
             <a:r>
               <a:rPr lang="en-US" sz="1400" dirty="0">
                 <a:solidFill>
-                  <a:srgbClr val="C9D3F5"/>
+                  <a:srgbClr val="1F2429"/>
                 </a:solidFill>
                 <a:latin typeface="Courier New" pitchFamily="34" charset="0"/>
                 <a:ea typeface="Courier New" pitchFamily="34" charset="-122"/>
@@ -6867,7 +6883,7 @@
             <a:r>
               <a:rPr lang="en-US" sz="1400" dirty="0">
                 <a:solidFill>
-                  <a:srgbClr val="C9D3F5"/>
+                  <a:srgbClr val="1F2429"/>
                 </a:solidFill>
                 <a:latin typeface="Courier New" pitchFamily="34" charset="0"/>
                 <a:ea typeface="Courier New" pitchFamily="34" charset="-122"/>
@@ -6887,7 +6903,7 @@
             <a:r>
               <a:rPr lang="en-US" sz="1400" dirty="0">
                 <a:solidFill>
-                  <a:srgbClr val="C9D3F5"/>
+                  <a:srgbClr val="1F2429"/>
                 </a:solidFill>
                 <a:latin typeface="Courier New" pitchFamily="34" charset="0"/>
                 <a:ea typeface="Courier New" pitchFamily="34" charset="-122"/>
@@ -8834,9 +8850,13 @@
             </a:avLst>
           </a:prstGeom>
           <a:solidFill>
-            <a:srgbClr val="1E1E4C"/>
+            <a:srgbClr val="F7F8F9"/>
           </a:solidFill>
-          <a:ln/>
+          <a:ln w="9525">
+            <a:solidFill>
+              <a:srgbClr val="D0D5DD"/>
+            </a:solidFill>
+          </a:ln>
         </p:spPr>
         <p:txBody>
           <a:bodyPr/>
@@ -8873,7 +8893,7 @@
             <a:r>
               <a:rPr lang="en-US" sz="1108" dirty="0">
                 <a:solidFill>
-                  <a:srgbClr val="C9D3F5"/>
+                  <a:srgbClr val="1F2429"/>
                 </a:solidFill>
                 <a:latin typeface="Courier New" pitchFamily="34" charset="0"/>
                 <a:ea typeface="Courier New" pitchFamily="34" charset="-122"/>
@@ -8893,7 +8913,7 @@
             <a:r>
               <a:rPr lang="en-US" sz="1108" dirty="0">
                 <a:solidFill>
-                  <a:srgbClr val="C9D3F5"/>
+                  <a:srgbClr val="1F2429"/>
                 </a:solidFill>
                 <a:latin typeface="Courier New" pitchFamily="34" charset="0"/>
                 <a:ea typeface="Courier New" pitchFamily="34" charset="-122"/>
@@ -8913,7 +8933,7 @@
             <a:r>
               <a:rPr lang="en-US" sz="1108" dirty="0">
                 <a:solidFill>
-                  <a:srgbClr val="C9D3F5"/>
+                  <a:srgbClr val="1F2429"/>
                 </a:solidFill>
                 <a:latin typeface="Courier New" pitchFamily="34" charset="0"/>
                 <a:ea typeface="Courier New" pitchFamily="34" charset="-122"/>
@@ -8933,7 +8953,7 @@
             <a:r>
               <a:rPr lang="en-US" sz="1108" dirty="0">
                 <a:solidFill>
-                  <a:srgbClr val="C9D3F5"/>
+                  <a:srgbClr val="1F2429"/>
                 </a:solidFill>
                 <a:latin typeface="Courier New" pitchFamily="34" charset="0"/>
                 <a:ea typeface="Courier New" pitchFamily="34" charset="-122"/>
@@ -8953,7 +8973,7 @@
             <a:r>
               <a:rPr lang="en-US" sz="1108" dirty="0">
                 <a:solidFill>
-                  <a:srgbClr val="C9D3F5"/>
+                  <a:srgbClr val="1F2429"/>
                 </a:solidFill>
                 <a:latin typeface="Courier New" pitchFamily="34" charset="0"/>
                 <a:ea typeface="Courier New" pitchFamily="34" charset="-122"/>
@@ -8973,7 +8993,7 @@
             <a:r>
               <a:rPr lang="en-US" sz="1108" dirty="0">
                 <a:solidFill>
-                  <a:srgbClr val="C9D3F5"/>
+                  <a:srgbClr val="1F2429"/>
                 </a:solidFill>
                 <a:latin typeface="Courier New" pitchFamily="34" charset="0"/>
                 <a:ea typeface="Courier New" pitchFamily="34" charset="-122"/>
@@ -8993,7 +9013,7 @@
             <a:r>
               <a:rPr lang="en-US" sz="1108" dirty="0">
                 <a:solidFill>
-                  <a:srgbClr val="C9D3F5"/>
+                  <a:srgbClr val="1F2429"/>
                 </a:solidFill>
                 <a:latin typeface="Courier New" pitchFamily="34" charset="0"/>
                 <a:ea typeface="Courier New" pitchFamily="34" charset="-122"/>
@@ -9013,7 +9033,7 @@
             <a:r>
               <a:rPr lang="en-US" sz="1108" dirty="0">
                 <a:solidFill>
-                  <a:srgbClr val="C9D3F5"/>
+                  <a:srgbClr val="1F2429"/>
                 </a:solidFill>
                 <a:latin typeface="Courier New" pitchFamily="34" charset="0"/>
                 <a:ea typeface="Courier New" pitchFamily="34" charset="-122"/>
@@ -9033,7 +9053,7 @@
             <a:r>
               <a:rPr lang="en-US" sz="1108" dirty="0">
                 <a:solidFill>
-                  <a:srgbClr val="C9D3F5"/>
+                  <a:srgbClr val="1F2429"/>
                 </a:solidFill>
                 <a:latin typeface="Courier New" pitchFamily="34" charset="0"/>
                 <a:ea typeface="Courier New" pitchFamily="34" charset="-122"/>
@@ -9053,7 +9073,7 @@
             <a:r>
               <a:rPr lang="en-US" sz="1108" dirty="0">
                 <a:solidFill>
-                  <a:srgbClr val="C9D3F5"/>
+                  <a:srgbClr val="1F2429"/>
                 </a:solidFill>
                 <a:latin typeface="Courier New" pitchFamily="34" charset="0"/>
                 <a:ea typeface="Courier New" pitchFamily="34" charset="-122"/>
@@ -9073,7 +9093,7 @@
             <a:r>
               <a:rPr lang="en-US" sz="1108" dirty="0">
                 <a:solidFill>
-                  <a:srgbClr val="C9D3F5"/>
+                  <a:srgbClr val="1F2429"/>
                 </a:solidFill>
                 <a:latin typeface="Courier New" pitchFamily="34" charset="0"/>
                 <a:ea typeface="Courier New" pitchFamily="34" charset="-122"/>
@@ -9093,7 +9113,7 @@
             <a:r>
               <a:rPr lang="en-US" sz="1108" dirty="0">
                 <a:solidFill>
-                  <a:srgbClr val="C9D3F5"/>
+                  <a:srgbClr val="1F2429"/>
                 </a:solidFill>
                 <a:latin typeface="Courier New" pitchFamily="34" charset="0"/>
                 <a:ea typeface="Courier New" pitchFamily="34" charset="-122"/>
@@ -9113,7 +9133,7 @@
             <a:r>
               <a:rPr lang="en-US" sz="1108" dirty="0">
                 <a:solidFill>
-                  <a:srgbClr val="C9D3F5"/>
+                  <a:srgbClr val="1F2429"/>
                 </a:solidFill>
                 <a:latin typeface="Courier New" pitchFamily="34" charset="0"/>
                 <a:ea typeface="Courier New" pitchFamily="34" charset="-122"/>
@@ -9326,7 +9346,7 @@
         <p:spPr>
           <a:xfrm>
             <a:off x="640080" y="1965960"/>
-            <a:ext cx="10911535" cy="2011680"/>
+            <a:ext cx="10911535" cy="3657600"/>
           </a:xfrm>
           <a:prstGeom prst="roundRect">
             <a:avLst>
@@ -9357,7 +9377,7 @@
         <p:spPr>
           <a:xfrm>
             <a:off x="868680" y="2103120"/>
-            <a:ext cx="10454335" cy="274320"/>
+            <a:ext cx="10454335" cy="400000"/>
           </a:xfrm>
           <a:prstGeom prst="rect">
             <a:avLst/>
@@ -9373,7 +9393,7 @@
               <a:buNone/>
             </a:pPr>
             <a:r>
-              <a:rPr lang="en-US" sz="1000" b="1" spc="200" kern="0" dirty="0">
+              <a:rPr lang="en-US" sz="1800" b="1" spc="200" kern="0" dirty="0">
                 <a:solidFill>
                   <a:srgbClr val="1F7A46"/>
                 </a:solidFill>
@@ -9383,7 +9403,7 @@
               </a:rPr>
               <a:t>TIP</a:t>
             </a:r>
-            <a:endParaRPr lang="en-US" sz="1000" dirty="0"/>
+            <a:endParaRPr lang="en-US" sz="1800" dirty="0"/>
           </a:p>
         </p:txBody>
       </p:sp>
@@ -9395,8 +9415,8 @@
         </p:nvSpPr>
         <p:spPr>
           <a:xfrm>
-            <a:off x="868680" y="2404872"/>
-            <a:ext cx="10454335" cy="1417320"/>
+            <a:off x="868680" y="2795960"/>
+            <a:ext cx="10454335" cy="2500000"/>
           </a:xfrm>
           <a:prstGeom prst="rect">
             <a:avLst/>
@@ -9405,14 +9425,14 @@
           <a:ln/>
         </p:spPr>
         <p:txBody>
-          <a:bodyPr wrap="square" lIns="0" tIns="0" rIns="0" bIns="0" rtlCol="0" anchor="t"/>
+          <a:bodyPr wrap="square" lIns="0" tIns="0" rIns="0" bIns="0" rtlCol="0" anchor="ctr"/>
           <a:lstStyle/>
           <a:p>
             <a:pPr indent="0" marL="0">
               <a:buNone/>
             </a:pPr>
             <a:r>
-              <a:rPr lang="en-US" sz="1250" dirty="0">
+              <a:rPr lang="en-US" sz="2800" dirty="0">
                 <a:solidFill>
                   <a:srgbClr val="26262F"/>
                 </a:solidFill>
@@ -9422,7 +9442,7 @@
               </a:rPr>
               <a:t>Even without res.format(), you perform a simpler form of content negotiation every time you choose res.json() vs. res.send() vs. res.render() — you are deciding, on the server side, what format to return. Full content negotiation just makes that decision dynamic, based on what the client actually asked for.</a:t>
             </a:r>
-            <a:endParaRPr lang="en-US" sz="1250" dirty="0"/>
+            <a:endParaRPr lang="en-US" sz="2800" dirty="0"/>
           </a:p>
         </p:txBody>
       </p:sp>
@@ -12946,7 +12966,7 @@
         <p:spPr>
           <a:xfrm>
             <a:off x="640080" y="1965960"/>
-            <a:ext cx="10911535" cy="1920240"/>
+            <a:ext cx="10911535" cy="3657600"/>
           </a:xfrm>
           <a:prstGeom prst="roundRect">
             <a:avLst>
@@ -12977,7 +12997,7 @@
         <p:spPr>
           <a:xfrm>
             <a:off x="868680" y="2103120"/>
-            <a:ext cx="10454335" cy="274320"/>
+            <a:ext cx="10454335" cy="400000"/>
           </a:xfrm>
           <a:prstGeom prst="rect">
             <a:avLst/>
@@ -12993,7 +13013,7 @@
               <a:buNone/>
             </a:pPr>
             <a:r>
-              <a:rPr lang="en-US" sz="1000" b="1" spc="200" kern="0" dirty="0">
+              <a:rPr lang="en-US" sz="1800" b="1" spc="200" kern="0" dirty="0">
                 <a:solidFill>
                   <a:srgbClr val="33459E"/>
                 </a:solidFill>
@@ -13003,7 +13023,7 @@
               </a:rPr>
               <a:t>NOTE</a:t>
             </a:r>
-            <a:endParaRPr lang="en-US" sz="1000" dirty="0"/>
+            <a:endParaRPr lang="en-US" sz="1800" dirty="0"/>
           </a:p>
         </p:txBody>
       </p:sp>
@@ -13015,8 +13035,8 @@
         </p:nvSpPr>
         <p:spPr>
           <a:xfrm>
-            <a:off x="868680" y="2404872"/>
-            <a:ext cx="10454335" cy="1325880"/>
+            <a:off x="868680" y="2795960"/>
+            <a:ext cx="10454335" cy="2500000"/>
           </a:xfrm>
           <a:prstGeom prst="rect">
             <a:avLst/>
@@ -13025,14 +13045,14 @@
           <a:ln/>
         </p:spPr>
         <p:txBody>
-          <a:bodyPr wrap="square" lIns="0" tIns="0" rIns="0" bIns="0" rtlCol="0" anchor="t"/>
+          <a:bodyPr wrap="square" lIns="0" tIns="0" rIns="0" bIns="0" rtlCol="0" anchor="ctr"/>
           <a:lstStyle/>
           <a:p>
             <a:pPr indent="0" marL="0">
               <a:buNone/>
             </a:pPr>
             <a:r>
-              <a:rPr lang="en-US" sz="1250" dirty="0">
+              <a:rPr lang="en-US" sz="2800" dirty="0">
                 <a:solidFill>
                   <a:srgbClr val="26262F"/>
                 </a:solidFill>
@@ -13042,7 +13062,7 @@
               </a:rPr>
               <a:t>A useful habit: 4xx means "look at what the client sent" — a bad request, a missing field, an unauthenticated user. 5xx means "look at your server code" — an unhandled exception, a database that's down, a bug. This distinction guides where you start debugging.</a:t>
             </a:r>
-            <a:endParaRPr lang="en-US" sz="1250" dirty="0"/>
+            <a:endParaRPr lang="en-US" sz="2800" dirty="0"/>
           </a:p>
         </p:txBody>
       </p:sp>
@@ -13216,9 +13236,13 @@
             </a:avLst>
           </a:prstGeom>
           <a:solidFill>
-            <a:srgbClr val="1E1E4C"/>
+            <a:srgbClr val="F7F8F9"/>
           </a:solidFill>
-          <a:ln/>
+          <a:ln w="9525">
+            <a:solidFill>
+              <a:srgbClr val="D0D5DD"/>
+            </a:solidFill>
+          </a:ln>
         </p:spPr>
         <p:txBody>
           <a:bodyPr/>
@@ -13255,7 +13279,7 @@
             <a:r>
               <a:rPr lang="en-US" sz="1400" dirty="0">
                 <a:solidFill>
-                  <a:srgbClr val="C9D3F5"/>
+                  <a:srgbClr val="1F2429"/>
                 </a:solidFill>
                 <a:latin typeface="Courier New" pitchFamily="34" charset="0"/>
                 <a:ea typeface="Courier New" pitchFamily="34" charset="-122"/>
